--- a/public/fun/pack/pptx/birthday/돌잔치_09_감사인사중심_모내기날.pptx
+++ b/public/fun/pack/pptx/birthday/돌잔치_09_감사인사중심_모내기날.pptx
@@ -3347,7 +3347,7 @@
             <a:r>
               <a:rPr sz="4000" b="1" i="0">
                 <a:solidFill>
-                  <a:srgbClr val="1C401C"/>
+                  <a:srgbClr val="216E21"/>
                 </a:solidFill>
               </a:rPr>
               <a:t>첫 번째 생일</a:t>
@@ -3385,7 +3385,7 @@
             <a:r>
               <a:rPr sz="1700" b="0" i="1">
                 <a:solidFill>
-                  <a:srgbClr val="1C401C"/>
+                  <a:srgbClr val="216E21"/>
                 </a:solidFill>
               </a:rPr>
               <a:t>저희 아이의 첫 생일에 모십니다</a:t>
@@ -3460,7 +3460,7 @@
     <p:bg>
       <p:bgPr>
         <a:solidFill>
-          <a:srgbClr val="F1F9F1"/>
+          <a:srgbClr val="F3FCF3"/>
         </a:solidFill>
         <a:effectLst/>
       </p:bgPr>
@@ -3487,7 +3487,7 @@
             <a:avLst/>
           </a:prstGeom>
           <a:solidFill>
-            <a:srgbClr val="3A883A"/>
+            <a:srgbClr val="4ECA4E"/>
           </a:solidFill>
           <a:ln>
             <a:noFill/>
@@ -3516,7 +3516,7 @@
             <a:avLst/>
           </a:prstGeom>
           <a:solidFill>
-            <a:srgbClr val="663D8F"/>
+            <a:srgbClr val="339941"/>
           </a:solidFill>
           <a:ln>
             <a:noFill/>
@@ -3560,7 +3560,7 @@
             <a:r>
               <a:rPr sz="3000" b="1" i="0">
                 <a:solidFill>
-                  <a:srgbClr val="1C401C"/>
+                  <a:srgbClr val="216E21"/>
                 </a:solidFill>
               </a:rPr>
               <a:t>우리 아기를 소개합니다</a:t>
@@ -3585,11 +3585,11 @@
             </a:avLst>
           </a:prstGeom>
           <a:solidFill>
-            <a:srgbClr val="D3EED3"/>
+            <a:srgbClr val="D4F7D4"/>
           </a:solidFill>
           <a:ln w="19050">
             <a:solidFill>
-              <a:srgbClr val="3A883A"/>
+              <a:srgbClr val="4ECA4E"/>
             </a:solidFill>
             <a:prstDash val="dash"/>
           </a:ln>
@@ -3608,7 +3608,7 @@
             <a:r>
               <a:rPr sz="1400" b="0" i="0">
                 <a:solidFill>
-                  <a:srgbClr val="1C401C"/>
+                  <a:srgbClr val="216E21"/>
                 </a:solidFill>
               </a:rPr>
               <a:t>아기 사진을 넣어 주세요</a:t>
@@ -3648,7 +3648,7 @@
                       <a:r>
                         <a:rPr sz="1500" b="1">
                           <a:solidFill>
-                            <a:srgbClr val="1C401C"/>
+                            <a:srgbClr val="216E21"/>
                           </a:solidFill>
                         </a:rPr>
                         <a:t>이름</a:t>
@@ -3658,30 +3658,30 @@
                   <a:tcPr anchor="ctr" marL="73152" marR="73152">
                     <a:lnL w="9525" cap="flat" cmpd="sng" algn="ctr">
                       <a:solidFill>
-                        <a:srgbClr val="D3EED3"/>
+                        <a:srgbClr val="D4F7D4"/>
                       </a:solidFill>
                       <a:prstDash val="solid"/>
                     </a:lnL>
                     <a:lnR w="9525" cap="flat" cmpd="sng" algn="ctr">
                       <a:solidFill>
-                        <a:srgbClr val="D3EED3"/>
+                        <a:srgbClr val="D4F7D4"/>
                       </a:solidFill>
                       <a:prstDash val="solid"/>
                     </a:lnR>
                     <a:lnT w="9525" cap="flat" cmpd="sng" algn="ctr">
                       <a:solidFill>
-                        <a:srgbClr val="D3EED3"/>
+                        <a:srgbClr val="D4F7D4"/>
                       </a:solidFill>
                       <a:prstDash val="solid"/>
                     </a:lnT>
                     <a:lnB w="9525" cap="flat" cmpd="sng" algn="ctr">
                       <a:solidFill>
-                        <a:srgbClr val="D3EED3"/>
+                        <a:srgbClr val="D4F7D4"/>
                       </a:solidFill>
                       <a:prstDash val="solid"/>
                     </a:lnB>
                     <a:solidFill>
-                      <a:srgbClr val="D3EED3"/>
+                      <a:srgbClr val="D4F7D4"/>
                     </a:solidFill>
                   </a:tcPr>
                 </a:tc>
@@ -3704,30 +3704,30 @@
                   <a:tcPr anchor="ctr" marL="73152" marR="73152">
                     <a:lnL w="9525" cap="flat" cmpd="sng" algn="ctr">
                       <a:solidFill>
-                        <a:srgbClr val="D3EED3"/>
+                        <a:srgbClr val="D4F7D4"/>
                       </a:solidFill>
                       <a:prstDash val="solid"/>
                     </a:lnL>
                     <a:lnR w="9525" cap="flat" cmpd="sng" algn="ctr">
                       <a:solidFill>
-                        <a:srgbClr val="D3EED3"/>
+                        <a:srgbClr val="D4F7D4"/>
                       </a:solidFill>
                       <a:prstDash val="solid"/>
                     </a:lnR>
                     <a:lnT w="9525" cap="flat" cmpd="sng" algn="ctr">
                       <a:solidFill>
-                        <a:srgbClr val="D3EED3"/>
+                        <a:srgbClr val="D4F7D4"/>
                       </a:solidFill>
                       <a:prstDash val="solid"/>
                     </a:lnT>
                     <a:lnB w="9525" cap="flat" cmpd="sng" algn="ctr">
                       <a:solidFill>
-                        <a:srgbClr val="D3EED3"/>
+                        <a:srgbClr val="D4F7D4"/>
                       </a:solidFill>
                       <a:prstDash val="solid"/>
                     </a:lnB>
                     <a:solidFill>
-                      <a:srgbClr val="F1F9F1"/>
+                      <a:srgbClr val="F3FCF3"/>
                     </a:solidFill>
                   </a:tcPr>
                 </a:tc>
@@ -3742,7 +3742,7 @@
                       <a:r>
                         <a:rPr sz="1500" b="1">
                           <a:solidFill>
-                            <a:srgbClr val="1C401C"/>
+                            <a:srgbClr val="216E21"/>
                           </a:solidFill>
                         </a:rPr>
                         <a:t>생일</a:t>
@@ -3752,30 +3752,30 @@
                   <a:tcPr anchor="ctr" marL="73152" marR="73152">
                     <a:lnL w="9525" cap="flat" cmpd="sng" algn="ctr">
                       <a:solidFill>
-                        <a:srgbClr val="D3EED3"/>
+                        <a:srgbClr val="D4F7D4"/>
                       </a:solidFill>
                       <a:prstDash val="solid"/>
                     </a:lnL>
                     <a:lnR w="9525" cap="flat" cmpd="sng" algn="ctr">
                       <a:solidFill>
-                        <a:srgbClr val="D3EED3"/>
+                        <a:srgbClr val="D4F7D4"/>
                       </a:solidFill>
                       <a:prstDash val="solid"/>
                     </a:lnR>
                     <a:lnT w="9525" cap="flat" cmpd="sng" algn="ctr">
                       <a:solidFill>
-                        <a:srgbClr val="D3EED3"/>
+                        <a:srgbClr val="D4F7D4"/>
                       </a:solidFill>
                       <a:prstDash val="solid"/>
                     </a:lnT>
                     <a:lnB w="9525" cap="flat" cmpd="sng" algn="ctr">
                       <a:solidFill>
-                        <a:srgbClr val="D3EED3"/>
+                        <a:srgbClr val="D4F7D4"/>
                       </a:solidFill>
                       <a:prstDash val="solid"/>
                     </a:lnB>
                     <a:solidFill>
-                      <a:srgbClr val="D3EED3"/>
+                      <a:srgbClr val="D4F7D4"/>
                     </a:solidFill>
                   </a:tcPr>
                 </a:tc>
@@ -3798,25 +3798,25 @@
                   <a:tcPr anchor="ctr" marL="73152" marR="73152">
                     <a:lnL w="9525" cap="flat" cmpd="sng" algn="ctr">
                       <a:solidFill>
-                        <a:srgbClr val="D3EED3"/>
+                        <a:srgbClr val="D4F7D4"/>
                       </a:solidFill>
                       <a:prstDash val="solid"/>
                     </a:lnL>
                     <a:lnR w="9525" cap="flat" cmpd="sng" algn="ctr">
                       <a:solidFill>
-                        <a:srgbClr val="D3EED3"/>
+                        <a:srgbClr val="D4F7D4"/>
                       </a:solidFill>
                       <a:prstDash val="solid"/>
                     </a:lnR>
                     <a:lnT w="9525" cap="flat" cmpd="sng" algn="ctr">
                       <a:solidFill>
-                        <a:srgbClr val="D3EED3"/>
+                        <a:srgbClr val="D4F7D4"/>
                       </a:solidFill>
                       <a:prstDash val="solid"/>
                     </a:lnT>
                     <a:lnB w="9525" cap="flat" cmpd="sng" algn="ctr">
                       <a:solidFill>
-                        <a:srgbClr val="D3EED3"/>
+                        <a:srgbClr val="D4F7D4"/>
                       </a:solidFill>
                       <a:prstDash val="solid"/>
                     </a:lnB>
@@ -3836,7 +3836,7 @@
                       <a:r>
                         <a:rPr sz="1500" b="1">
                           <a:solidFill>
-                            <a:srgbClr val="1C401C"/>
+                            <a:srgbClr val="216E21"/>
                           </a:solidFill>
                         </a:rPr>
                         <a:t>키 · 몸무게</a:t>
@@ -3846,30 +3846,30 @@
                   <a:tcPr anchor="ctr" marL="73152" marR="73152">
                     <a:lnL w="9525" cap="flat" cmpd="sng" algn="ctr">
                       <a:solidFill>
-                        <a:srgbClr val="D3EED3"/>
+                        <a:srgbClr val="D4F7D4"/>
                       </a:solidFill>
                       <a:prstDash val="solid"/>
                     </a:lnL>
                     <a:lnR w="9525" cap="flat" cmpd="sng" algn="ctr">
                       <a:solidFill>
-                        <a:srgbClr val="D3EED3"/>
+                        <a:srgbClr val="D4F7D4"/>
                       </a:solidFill>
                       <a:prstDash val="solid"/>
                     </a:lnR>
                     <a:lnT w="9525" cap="flat" cmpd="sng" algn="ctr">
                       <a:solidFill>
-                        <a:srgbClr val="D3EED3"/>
+                        <a:srgbClr val="D4F7D4"/>
                       </a:solidFill>
                       <a:prstDash val="solid"/>
                     </a:lnT>
                     <a:lnB w="9525" cap="flat" cmpd="sng" algn="ctr">
                       <a:solidFill>
-                        <a:srgbClr val="D3EED3"/>
+                        <a:srgbClr val="D4F7D4"/>
                       </a:solidFill>
                       <a:prstDash val="solid"/>
                     </a:lnB>
                     <a:solidFill>
-                      <a:srgbClr val="D3EED3"/>
+                      <a:srgbClr val="D4F7D4"/>
                     </a:solidFill>
                   </a:tcPr>
                 </a:tc>
@@ -3892,30 +3892,30 @@
                   <a:tcPr anchor="ctr" marL="73152" marR="73152">
                     <a:lnL w="9525" cap="flat" cmpd="sng" algn="ctr">
                       <a:solidFill>
-                        <a:srgbClr val="D3EED3"/>
+                        <a:srgbClr val="D4F7D4"/>
                       </a:solidFill>
                       <a:prstDash val="solid"/>
                     </a:lnL>
                     <a:lnR w="9525" cap="flat" cmpd="sng" algn="ctr">
                       <a:solidFill>
-                        <a:srgbClr val="D3EED3"/>
+                        <a:srgbClr val="D4F7D4"/>
                       </a:solidFill>
                       <a:prstDash val="solid"/>
                     </a:lnR>
                     <a:lnT w="9525" cap="flat" cmpd="sng" algn="ctr">
                       <a:solidFill>
-                        <a:srgbClr val="D3EED3"/>
+                        <a:srgbClr val="D4F7D4"/>
                       </a:solidFill>
                       <a:prstDash val="solid"/>
                     </a:lnT>
                     <a:lnB w="9525" cap="flat" cmpd="sng" algn="ctr">
                       <a:solidFill>
-                        <a:srgbClr val="D3EED3"/>
+                        <a:srgbClr val="D4F7D4"/>
                       </a:solidFill>
                       <a:prstDash val="solid"/>
                     </a:lnB>
                     <a:solidFill>
-                      <a:srgbClr val="F1F9F1"/>
+                      <a:srgbClr val="F3FCF3"/>
                     </a:solidFill>
                   </a:tcPr>
                 </a:tc>
@@ -3930,7 +3930,7 @@
                       <a:r>
                         <a:rPr sz="1500" b="1">
                           <a:solidFill>
-                            <a:srgbClr val="1C401C"/>
+                            <a:srgbClr val="216E21"/>
                           </a:solidFill>
                         </a:rPr>
                         <a:t>좋아하는 것</a:t>
@@ -3940,30 +3940,30 @@
                   <a:tcPr anchor="ctr" marL="73152" marR="73152">
                     <a:lnL w="9525" cap="flat" cmpd="sng" algn="ctr">
                       <a:solidFill>
-                        <a:srgbClr val="D3EED3"/>
+                        <a:srgbClr val="D4F7D4"/>
                       </a:solidFill>
                       <a:prstDash val="solid"/>
                     </a:lnL>
                     <a:lnR w="9525" cap="flat" cmpd="sng" algn="ctr">
                       <a:solidFill>
-                        <a:srgbClr val="D3EED3"/>
+                        <a:srgbClr val="D4F7D4"/>
                       </a:solidFill>
                       <a:prstDash val="solid"/>
                     </a:lnR>
                     <a:lnT w="9525" cap="flat" cmpd="sng" algn="ctr">
                       <a:solidFill>
-                        <a:srgbClr val="D3EED3"/>
+                        <a:srgbClr val="D4F7D4"/>
                       </a:solidFill>
                       <a:prstDash val="solid"/>
                     </a:lnT>
                     <a:lnB w="9525" cap="flat" cmpd="sng" algn="ctr">
                       <a:solidFill>
-                        <a:srgbClr val="D3EED3"/>
+                        <a:srgbClr val="D4F7D4"/>
                       </a:solidFill>
                       <a:prstDash val="solid"/>
                     </a:lnB>
                     <a:solidFill>
-                      <a:srgbClr val="D3EED3"/>
+                      <a:srgbClr val="D4F7D4"/>
                     </a:solidFill>
                   </a:tcPr>
                 </a:tc>
@@ -3986,25 +3986,25 @@
                   <a:tcPr anchor="ctr" marL="73152" marR="73152">
                     <a:lnL w="9525" cap="flat" cmpd="sng" algn="ctr">
                       <a:solidFill>
-                        <a:srgbClr val="D3EED3"/>
+                        <a:srgbClr val="D4F7D4"/>
                       </a:solidFill>
                       <a:prstDash val="solid"/>
                     </a:lnL>
                     <a:lnR w="9525" cap="flat" cmpd="sng" algn="ctr">
                       <a:solidFill>
-                        <a:srgbClr val="D3EED3"/>
+                        <a:srgbClr val="D4F7D4"/>
                       </a:solidFill>
                       <a:prstDash val="solid"/>
                     </a:lnR>
                     <a:lnT w="9525" cap="flat" cmpd="sng" algn="ctr">
                       <a:solidFill>
-                        <a:srgbClr val="D3EED3"/>
+                        <a:srgbClr val="D4F7D4"/>
                       </a:solidFill>
                       <a:prstDash val="solid"/>
                     </a:lnT>
                     <a:lnB w="9525" cap="flat" cmpd="sng" algn="ctr">
                       <a:solidFill>
-                        <a:srgbClr val="D3EED3"/>
+                        <a:srgbClr val="D4F7D4"/>
                       </a:solidFill>
                       <a:prstDash val="solid"/>
                     </a:lnB>
@@ -4024,7 +4024,7 @@
                       <a:r>
                         <a:rPr sz="1500" b="1">
                           <a:solidFill>
-                            <a:srgbClr val="1C401C"/>
+                            <a:srgbClr val="216E21"/>
                           </a:solidFill>
                         </a:rPr>
                         <a:t>별명</a:t>
@@ -4034,30 +4034,30 @@
                   <a:tcPr anchor="ctr" marL="73152" marR="73152">
                     <a:lnL w="9525" cap="flat" cmpd="sng" algn="ctr">
                       <a:solidFill>
-                        <a:srgbClr val="D3EED3"/>
+                        <a:srgbClr val="D4F7D4"/>
                       </a:solidFill>
                       <a:prstDash val="solid"/>
                     </a:lnL>
                     <a:lnR w="9525" cap="flat" cmpd="sng" algn="ctr">
                       <a:solidFill>
-                        <a:srgbClr val="D3EED3"/>
+                        <a:srgbClr val="D4F7D4"/>
                       </a:solidFill>
                       <a:prstDash val="solid"/>
                     </a:lnR>
                     <a:lnT w="9525" cap="flat" cmpd="sng" algn="ctr">
                       <a:solidFill>
-                        <a:srgbClr val="D3EED3"/>
+                        <a:srgbClr val="D4F7D4"/>
                       </a:solidFill>
                       <a:prstDash val="solid"/>
                     </a:lnT>
                     <a:lnB w="9525" cap="flat" cmpd="sng" algn="ctr">
                       <a:solidFill>
-                        <a:srgbClr val="D3EED3"/>
+                        <a:srgbClr val="D4F7D4"/>
                       </a:solidFill>
                       <a:prstDash val="solid"/>
                     </a:lnB>
                     <a:solidFill>
-                      <a:srgbClr val="D3EED3"/>
+                      <a:srgbClr val="D4F7D4"/>
                     </a:solidFill>
                   </a:tcPr>
                 </a:tc>
@@ -4080,30 +4080,30 @@
                   <a:tcPr anchor="ctr" marL="73152" marR="73152">
                     <a:lnL w="9525" cap="flat" cmpd="sng" algn="ctr">
                       <a:solidFill>
-                        <a:srgbClr val="D3EED3"/>
+                        <a:srgbClr val="D4F7D4"/>
                       </a:solidFill>
                       <a:prstDash val="solid"/>
                     </a:lnL>
                     <a:lnR w="9525" cap="flat" cmpd="sng" algn="ctr">
                       <a:solidFill>
-                        <a:srgbClr val="D3EED3"/>
+                        <a:srgbClr val="D4F7D4"/>
                       </a:solidFill>
                       <a:prstDash val="solid"/>
                     </a:lnR>
                     <a:lnT w="9525" cap="flat" cmpd="sng" algn="ctr">
                       <a:solidFill>
-                        <a:srgbClr val="D3EED3"/>
+                        <a:srgbClr val="D4F7D4"/>
                       </a:solidFill>
                       <a:prstDash val="solid"/>
                     </a:lnT>
                     <a:lnB w="9525" cap="flat" cmpd="sng" algn="ctr">
                       <a:solidFill>
-                        <a:srgbClr val="D3EED3"/>
+                        <a:srgbClr val="D4F7D4"/>
                       </a:solidFill>
                       <a:prstDash val="solid"/>
                     </a:lnB>
                     <a:solidFill>
-                      <a:srgbClr val="F1F9F1"/>
+                      <a:srgbClr val="F3FCF3"/>
                     </a:solidFill>
                   </a:tcPr>
                 </a:tc>
@@ -4118,7 +4118,7 @@
                       <a:r>
                         <a:rPr sz="1500" b="1">
                           <a:solidFill>
-                            <a:srgbClr val="1C401C"/>
+                            <a:srgbClr val="216E21"/>
                           </a:solidFill>
                         </a:rPr>
                         <a:t>부모의 마음</a:t>
@@ -4128,30 +4128,30 @@
                   <a:tcPr anchor="ctr" marL="73152" marR="73152">
                     <a:lnL w="9525" cap="flat" cmpd="sng" algn="ctr">
                       <a:solidFill>
-                        <a:srgbClr val="D3EED3"/>
+                        <a:srgbClr val="D4F7D4"/>
                       </a:solidFill>
                       <a:prstDash val="solid"/>
                     </a:lnL>
                     <a:lnR w="9525" cap="flat" cmpd="sng" algn="ctr">
                       <a:solidFill>
-                        <a:srgbClr val="D3EED3"/>
+                        <a:srgbClr val="D4F7D4"/>
                       </a:solidFill>
                       <a:prstDash val="solid"/>
                     </a:lnR>
                     <a:lnT w="9525" cap="flat" cmpd="sng" algn="ctr">
                       <a:solidFill>
-                        <a:srgbClr val="D3EED3"/>
+                        <a:srgbClr val="D4F7D4"/>
                       </a:solidFill>
                       <a:prstDash val="solid"/>
                     </a:lnT>
                     <a:lnB w="9525" cap="flat" cmpd="sng" algn="ctr">
                       <a:solidFill>
-                        <a:srgbClr val="D3EED3"/>
+                        <a:srgbClr val="D4F7D4"/>
                       </a:solidFill>
                       <a:prstDash val="solid"/>
                     </a:lnB>
                     <a:solidFill>
-                      <a:srgbClr val="D3EED3"/>
+                      <a:srgbClr val="D4F7D4"/>
                     </a:solidFill>
                   </a:tcPr>
                 </a:tc>
@@ -4174,25 +4174,25 @@
                   <a:tcPr anchor="ctr" marL="73152" marR="73152">
                     <a:lnL w="9525" cap="flat" cmpd="sng" algn="ctr">
                       <a:solidFill>
-                        <a:srgbClr val="D3EED3"/>
+                        <a:srgbClr val="D4F7D4"/>
                       </a:solidFill>
                       <a:prstDash val="solid"/>
                     </a:lnL>
                     <a:lnR w="9525" cap="flat" cmpd="sng" algn="ctr">
                       <a:solidFill>
-                        <a:srgbClr val="D3EED3"/>
+                        <a:srgbClr val="D4F7D4"/>
                       </a:solidFill>
                       <a:prstDash val="solid"/>
                     </a:lnR>
                     <a:lnT w="9525" cap="flat" cmpd="sng" algn="ctr">
                       <a:solidFill>
-                        <a:srgbClr val="D3EED3"/>
+                        <a:srgbClr val="D4F7D4"/>
                       </a:solidFill>
                       <a:prstDash val="solid"/>
                     </a:lnT>
                     <a:lnB w="9525" cap="flat" cmpd="sng" algn="ctr">
                       <a:solidFill>
-                        <a:srgbClr val="D3EED3"/>
+                        <a:srgbClr val="D4F7D4"/>
                       </a:solidFill>
                       <a:prstDash val="solid"/>
                     </a:lnB>
@@ -4220,7 +4220,7 @@
     <p:bg>
       <p:bgPr>
         <a:solidFill>
-          <a:srgbClr val="F1F9F1"/>
+          <a:srgbClr val="F3FCF3"/>
         </a:solidFill>
         <a:effectLst/>
       </p:bgPr>
@@ -4247,7 +4247,7 @@
             <a:avLst/>
           </a:prstGeom>
           <a:solidFill>
-            <a:srgbClr val="3A883A"/>
+            <a:srgbClr val="4ECA4E"/>
           </a:solidFill>
           <a:ln>
             <a:noFill/>
@@ -4276,7 +4276,7 @@
             <a:avLst/>
           </a:prstGeom>
           <a:solidFill>
-            <a:srgbClr val="663D8F"/>
+            <a:srgbClr val="339941"/>
           </a:solidFill>
           <a:ln>
             <a:noFill/>
@@ -4320,7 +4320,7 @@
             <a:r>
               <a:rPr sz="3000" b="1" i="0">
                 <a:solidFill>
-                  <a:srgbClr val="1C401C"/>
+                  <a:srgbClr val="216E21"/>
                 </a:solidFill>
               </a:rPr>
               <a:t>초대합니다</a:t>
@@ -4345,11 +4345,11 @@
             </a:avLst>
           </a:prstGeom>
           <a:solidFill>
-            <a:srgbClr val="F1F9F1"/>
+            <a:srgbClr val="F3FCF3"/>
           </a:solidFill>
           <a:ln w="12700">
             <a:solidFill>
-              <a:srgbClr val="D3EED3"/>
+              <a:srgbClr val="D4F7D4"/>
             </a:solidFill>
           </a:ln>
         </p:spPr>
@@ -4473,7 +4473,7 @@
     <p:bg>
       <p:bgPr>
         <a:solidFill>
-          <a:srgbClr val="F1F9F1"/>
+          <a:srgbClr val="F3FCF3"/>
         </a:solidFill>
         <a:effectLst/>
       </p:bgPr>
@@ -4500,7 +4500,7 @@
             <a:avLst/>
           </a:prstGeom>
           <a:solidFill>
-            <a:srgbClr val="3A883A"/>
+            <a:srgbClr val="4ECA4E"/>
           </a:solidFill>
           <a:ln>
             <a:noFill/>
@@ -4529,7 +4529,7 @@
             <a:avLst/>
           </a:prstGeom>
           <a:solidFill>
-            <a:srgbClr val="663D8F"/>
+            <a:srgbClr val="339941"/>
           </a:solidFill>
           <a:ln>
             <a:noFill/>
@@ -4573,7 +4573,7 @@
             <a:r>
               <a:rPr sz="3000" b="1" i="0">
                 <a:solidFill>
-                  <a:srgbClr val="1C401C"/>
+                  <a:srgbClr val="216E21"/>
                 </a:solidFill>
               </a:rPr>
               <a:t>부모의 한마디</a:t>
@@ -4598,11 +4598,11 @@
             </a:avLst>
           </a:prstGeom>
           <a:solidFill>
-            <a:srgbClr val="D3EED3"/>
+            <a:srgbClr val="D4F7D4"/>
           </a:solidFill>
           <a:ln w="12700">
             <a:solidFill>
-              <a:srgbClr val="3A883A"/>
+              <a:srgbClr val="4ECA4E"/>
             </a:solidFill>
           </a:ln>
         </p:spPr>
@@ -4726,7 +4726,7 @@
     <p:bg>
       <p:bgPr>
         <a:solidFill>
-          <a:srgbClr val="F1F9F1"/>
+          <a:srgbClr val="F3FCF3"/>
         </a:solidFill>
         <a:effectLst/>
       </p:bgPr>
@@ -4753,7 +4753,7 @@
             <a:avLst/>
           </a:prstGeom>
           <a:solidFill>
-            <a:srgbClr val="3A883A"/>
+            <a:srgbClr val="4ECA4E"/>
           </a:solidFill>
           <a:ln>
             <a:noFill/>
@@ -4782,7 +4782,7 @@
             <a:avLst/>
           </a:prstGeom>
           <a:solidFill>
-            <a:srgbClr val="663D8F"/>
+            <a:srgbClr val="339941"/>
           </a:solidFill>
           <a:ln>
             <a:noFill/>
@@ -4826,7 +4826,7 @@
             <a:r>
               <a:rPr sz="3000" b="1" i="0">
                 <a:solidFill>
-                  <a:srgbClr val="1C401C"/>
+                  <a:srgbClr val="216E21"/>
                 </a:solidFill>
               </a:rPr>
               <a:t>사진 모음</a:t>
@@ -4851,11 +4851,11 @@
             </a:avLst>
           </a:prstGeom>
           <a:solidFill>
-            <a:srgbClr val="D3EED3"/>
+            <a:srgbClr val="D4F7D4"/>
           </a:solidFill>
           <a:ln w="19050">
             <a:solidFill>
-              <a:srgbClr val="3A883A"/>
+              <a:srgbClr val="4ECA4E"/>
             </a:solidFill>
             <a:prstDash val="dash"/>
           </a:ln>
@@ -4874,7 +4874,7 @@
             <a:r>
               <a:rPr sz="1200" b="0" i="0">
                 <a:solidFill>
-                  <a:srgbClr val="1C401C"/>
+                  <a:srgbClr val="216E21"/>
                 </a:solidFill>
               </a:rPr>
               <a:t>사진 1</a:t>
@@ -4899,11 +4899,11 @@
             </a:avLst>
           </a:prstGeom>
           <a:solidFill>
-            <a:srgbClr val="D3EED3"/>
+            <a:srgbClr val="D4F7D4"/>
           </a:solidFill>
           <a:ln w="19050">
             <a:solidFill>
-              <a:srgbClr val="3A883A"/>
+              <a:srgbClr val="4ECA4E"/>
             </a:solidFill>
             <a:prstDash val="dash"/>
           </a:ln>
@@ -4922,7 +4922,7 @@
             <a:r>
               <a:rPr sz="1200" b="0" i="0">
                 <a:solidFill>
-                  <a:srgbClr val="1C401C"/>
+                  <a:srgbClr val="216E21"/>
                 </a:solidFill>
               </a:rPr>
               <a:t>사진 2</a:t>
@@ -4947,11 +4947,11 @@
             </a:avLst>
           </a:prstGeom>
           <a:solidFill>
-            <a:srgbClr val="D3EED3"/>
+            <a:srgbClr val="D4F7D4"/>
           </a:solidFill>
           <a:ln w="19050">
             <a:solidFill>
-              <a:srgbClr val="3A883A"/>
+              <a:srgbClr val="4ECA4E"/>
             </a:solidFill>
             <a:prstDash val="dash"/>
           </a:ln>
@@ -4970,7 +4970,7 @@
             <a:r>
               <a:rPr sz="1200" b="0" i="0">
                 <a:solidFill>
-                  <a:srgbClr val="1C401C"/>
+                  <a:srgbClr val="216E21"/>
                 </a:solidFill>
               </a:rPr>
               <a:t>사진 3</a:t>
@@ -4995,11 +4995,11 @@
             </a:avLst>
           </a:prstGeom>
           <a:solidFill>
-            <a:srgbClr val="D3EED3"/>
+            <a:srgbClr val="D4F7D4"/>
           </a:solidFill>
           <a:ln w="19050">
             <a:solidFill>
-              <a:srgbClr val="3A883A"/>
+              <a:srgbClr val="4ECA4E"/>
             </a:solidFill>
             <a:prstDash val="dash"/>
           </a:ln>
@@ -5018,7 +5018,7 @@
             <a:r>
               <a:rPr sz="1200" b="0" i="0">
                 <a:solidFill>
-                  <a:srgbClr val="1C401C"/>
+                  <a:srgbClr val="216E21"/>
                 </a:solidFill>
               </a:rPr>
               <a:t>사진 4</a:t>
@@ -5043,11 +5043,11 @@
             </a:avLst>
           </a:prstGeom>
           <a:solidFill>
-            <a:srgbClr val="D3EED3"/>
+            <a:srgbClr val="D4F7D4"/>
           </a:solidFill>
           <a:ln w="19050">
             <a:solidFill>
-              <a:srgbClr val="3A883A"/>
+              <a:srgbClr val="4ECA4E"/>
             </a:solidFill>
             <a:prstDash val="dash"/>
           </a:ln>
@@ -5066,7 +5066,7 @@
             <a:r>
               <a:rPr sz="1200" b="0" i="0">
                 <a:solidFill>
-                  <a:srgbClr val="1C401C"/>
+                  <a:srgbClr val="216E21"/>
                 </a:solidFill>
               </a:rPr>
               <a:t>사진 5</a:t>
@@ -5091,11 +5091,11 @@
             </a:avLst>
           </a:prstGeom>
           <a:solidFill>
-            <a:srgbClr val="D3EED3"/>
+            <a:srgbClr val="D4F7D4"/>
           </a:solidFill>
           <a:ln w="19050">
             <a:solidFill>
-              <a:srgbClr val="3A883A"/>
+              <a:srgbClr val="4ECA4E"/>
             </a:solidFill>
             <a:prstDash val="dash"/>
           </a:ln>
@@ -5114,7 +5114,7 @@
             <a:r>
               <a:rPr sz="1200" b="0" i="0">
                 <a:solidFill>
-                  <a:srgbClr val="1C401C"/>
+                  <a:srgbClr val="216E21"/>
                 </a:solidFill>
               </a:rPr>
               <a:t>사진 6</a:t>
@@ -5139,11 +5139,11 @@
             </a:avLst>
           </a:prstGeom>
           <a:solidFill>
-            <a:srgbClr val="D3EED3"/>
+            <a:srgbClr val="D4F7D4"/>
           </a:solidFill>
           <a:ln w="19050">
             <a:solidFill>
-              <a:srgbClr val="3A883A"/>
+              <a:srgbClr val="4ECA4E"/>
             </a:solidFill>
             <a:prstDash val="dash"/>
           </a:ln>
@@ -5162,7 +5162,7 @@
             <a:r>
               <a:rPr sz="1200" b="0" i="0">
                 <a:solidFill>
-                  <a:srgbClr val="1C401C"/>
+                  <a:srgbClr val="216E21"/>
                 </a:solidFill>
               </a:rPr>
               <a:t>사진 7</a:t>
@@ -5187,11 +5187,11 @@
             </a:avLst>
           </a:prstGeom>
           <a:solidFill>
-            <a:srgbClr val="D3EED3"/>
+            <a:srgbClr val="D4F7D4"/>
           </a:solidFill>
           <a:ln w="19050">
             <a:solidFill>
-              <a:srgbClr val="3A883A"/>
+              <a:srgbClr val="4ECA4E"/>
             </a:solidFill>
             <a:prstDash val="dash"/>
           </a:ln>
@@ -5210,7 +5210,7 @@
             <a:r>
               <a:rPr sz="1200" b="0" i="0">
                 <a:solidFill>
-                  <a:srgbClr val="1C401C"/>
+                  <a:srgbClr val="216E21"/>
                 </a:solidFill>
               </a:rPr>
               <a:t>사진 8</a:t>
@@ -5290,7 +5290,7 @@
             <a:r>
               <a:rPr sz="3400" b="1" i="0">
                 <a:solidFill>
-                  <a:srgbClr val="1C401C"/>
+                  <a:srgbClr val="216E21"/>
                 </a:solidFill>
               </a:rPr>
               <a:t>와 주셔서 고맙습니다</a:t>
@@ -5328,7 +5328,7 @@
             <a:r>
               <a:rPr sz="1700" b="0" i="1">
                 <a:solidFill>
-                  <a:srgbClr val="1C401C"/>
+                  <a:srgbClr val="216E21"/>
                 </a:solidFill>
               </a:rPr>
               <a:t>아이가 한 살이 되었습니다</a:t>
@@ -5393,34 +5393,34 @@
         <a:sysClr val="window" lastClr="FFFFFF"/>
       </a:lt1>
       <a:dk2>
-        <a:srgbClr val="1C401C"/>
+        <a:srgbClr val="216E21"/>
       </a:dk2>
       <a:lt2>
-        <a:srgbClr val="F1F9F1"/>
+        <a:srgbClr val="F3FCF3"/>
       </a:lt2>
       <a:accent1>
-        <a:srgbClr val="3A883A"/>
+        <a:srgbClr val="4ECA4E"/>
       </a:accent1>
       <a:accent2>
-        <a:srgbClr val="663D8F"/>
+        <a:srgbClr val="339941"/>
       </a:accent2>
       <a:accent3>
-        <a:srgbClr val="1C401C"/>
+        <a:srgbClr val="216E21"/>
       </a:accent3>
       <a:accent4>
-        <a:srgbClr val="D3EED3"/>
+        <a:srgbClr val="D4F7D4"/>
       </a:accent4>
       <a:accent5>
-        <a:srgbClr val="506264"/>
+        <a:srgbClr val="40B248"/>
       </a:accent5>
       <a:accent6>
-        <a:srgbClr val="778C77"/>
+        <a:srgbClr val="7AA87A"/>
       </a:accent6>
       <a:hlink>
-        <a:srgbClr val="3A883A"/>
+        <a:srgbClr val="4ECA4E"/>
       </a:hlink>
       <a:folHlink>
-        <a:srgbClr val="1C401C"/>
+        <a:srgbClr val="216E21"/>
       </a:folHlink>
     </a:clrScheme>
     <a:fontScheme name="Office">

--- a/public/fun/pack/pptx/birthday/돌잔치_09_감사인사중심_모내기날.pptx
+++ b/public/fun/pack/pptx/birthday/돌잔치_09_감사인사중심_모내기날.pptx
@@ -3286,6 +3286,14 @@
 <file path=ppt/slides/slide1.xml><?xml version="1.0" encoding="utf-8"?>
 <p:sld xmlns:a="http://schemas.openxmlformats.org/drawingml/2006/main" xmlns:p="http://schemas.openxmlformats.org/presentationml/2006/main" xmlns:r="http://schemas.openxmlformats.org/officeDocument/2006/relationships">
   <p:cSld>
+    <p:bg>
+      <p:bgPr>
+        <a:solidFill>
+          <a:srgbClr val="EAFDEA"/>
+        </a:solidFill>
+        <a:effectLst/>
+      </p:bgPr>
+    </p:bg>
     <p:spTree>
       <p:nvGrpSpPr>
         <p:cNvPr id="1" name=""/>
@@ -3293,30 +3301,119 @@
         <p:nvPr/>
       </p:nvGrpSpPr>
       <p:grpSpPr/>
-      <p:pic>
-        <p:nvPicPr>
-          <p:cNvPr id="3" name="표지 그림" descr="birthday-09.jpg"/>
-          <p:cNvPicPr>
-            <a:picLocks noChangeAspect="1"/>
-          </p:cNvPicPr>
+      <p:sp>
+        <p:nvSpPr>
+          <p:cNvPr id="3" name="사진 자리"/>
+          <p:cNvSpPr/>
           <p:nvPr/>
-        </p:nvPicPr>
-        <p:blipFill>
-          <a:blip r:embed="rId2"/>
-          <a:stretch>
-            <a:fillRect/>
-          </a:stretch>
-        </p:blipFill>
-        <p:spPr>
-          <a:xfrm>
-            <a:off x="0" y="0"/>
-            <a:ext cx="12191695" cy="6858000"/>
+        </p:nvSpPr>
+        <p:spPr>
+          <a:xfrm>
+            <a:off x="1463003" y="685800"/>
+            <a:ext cx="3169840" cy="5486400"/>
+          </a:xfrm>
+          <a:prstGeom prst="round2SameRect">
+            <a:avLst>
+              <a:gd name="adj1" fmla="val 50000"/>
+              <a:gd name="adj2" fmla="val 0"/>
+            </a:avLst>
+          </a:prstGeom>
+          <a:solidFill>
+            <a:srgbClr val="A6F2A6"/>
+          </a:solidFill>
+          <a:ln>
+            <a:noFill/>
+          </a:ln>
+        </p:spPr>
+        <p:txBody>
+          <a:bodyPr rtlCol="0" anchor="ctr" wrap="square" lIns="54864" rIns="54864" tIns="27432" bIns="27432">
+            <a:noAutofit/>
+          </a:bodyPr>
+          <a:lstStyle/>
+          <a:p>
+            <a:pPr algn="ctr">
+              <a:lnSpc>
+                <a:spcPct val="100000"/>
+              </a:lnSpc>
+            </a:pPr>
+            <a:r>
+              <a:rPr sz="1400" b="0" i="0">
+                <a:solidFill>
+                  <a:srgbClr val="274927"/>
+                </a:solidFill>
+              </a:rPr>
+              <a:t>사진을 넣어 주세요</a:t>
+            </a:r>
+          </a:p>
+        </p:txBody>
+      </p:sp>
+      <p:sp>
+        <p:nvSpPr>
+          <p:cNvPr id="4" name="장식"/>
+          <p:cNvSpPr/>
+          <p:nvPr/>
+        </p:nvSpPr>
+        <p:spPr>
+          <a:xfrm>
+            <a:off x="4358505" y="4251960"/>
+            <a:ext cx="1005840" cy="1005840"/>
+          </a:xfrm>
+          <a:prstGeom prst="ellipse">
+            <a:avLst/>
+          </a:prstGeom>
+          <a:solidFill>
+            <a:srgbClr val="A6F2A6"/>
+          </a:solidFill>
+          <a:ln>
+            <a:noFill/>
+          </a:ln>
+        </p:spPr>
+        <p:txBody>
+          <a:bodyPr rtlCol="0" anchor="ctr"/>
+          <a:lstStyle/>
+          <a:p>
+            <a:pPr algn="ctr"/>
+          </a:p>
+        </p:txBody>
+      </p:sp>
+      <p:sp>
+        <p:nvSpPr>
+          <p:cNvPr id="5" name="라벨"/>
+          <p:cNvSpPr txBox="1"/>
+          <p:nvPr/>
+        </p:nvSpPr>
+        <p:spPr>
+          <a:xfrm>
+            <a:off x="6827349" y="2148840"/>
+            <a:ext cx="4632844" cy="274320"/>
           </a:xfrm>
           <a:prstGeom prst="rect">
             <a:avLst/>
           </a:prstGeom>
-        </p:spPr>
-      </p:pic>
+          <a:noFill/>
+        </p:spPr>
+        <p:txBody>
+          <a:bodyPr wrap="square" lIns="54864" rIns="54864" tIns="27432" bIns="27432" anchor="t">
+            <a:noAutofit/>
+          </a:bodyPr>
+          <a:lstStyle/>
+          <a:p>
+            <a:pPr algn="l">
+              <a:lnSpc>
+                <a:spcPct val="115000"/>
+              </a:lnSpc>
+            </a:pPr>
+            <a:r>
+              <a:rPr sz="1000" b="1" i="0" spc="250">
+                <a:solidFill>
+                  <a:srgbClr val="26231F"/>
+                </a:solidFill>
+              </a:rPr>
+              <a:t>FIRST BIRTHDAY</a:t>
+            </a:r>
+          </a:p>
+        </p:txBody>
+      </p:sp>
       <p:sp>
         <p:nvSpPr>
           <p:cNvPr id="2" name="Title 1"/>
@@ -3329,8 +3426,8 @@
         </p:nvSpPr>
         <p:spPr>
           <a:xfrm>
-            <a:off x="853418" y="2057400"/>
-            <a:ext cx="6095847" cy="1554480"/>
+            <a:off x="6827349" y="2606040"/>
+            <a:ext cx="4632844" cy="1188720"/>
           </a:xfrm>
         </p:spPr>
         <p:txBody>
@@ -3347,7 +3444,7 @@
             <a:r>
               <a:rPr sz="4000" b="1" i="0">
                 <a:solidFill>
-                  <a:srgbClr val="216E21"/>
+                  <a:srgbClr val="26231F"/>
                 </a:solidFill>
               </a:rPr>
               <a:t>첫 번째 생일</a:t>
@@ -3357,14 +3454,14 @@
       </p:sp>
       <p:sp>
         <p:nvSpPr>
-          <p:cNvPr id="4" name="한 줄 문구"/>
+          <p:cNvPr id="6" name="한 줄 문구"/>
           <p:cNvSpPr txBox="1"/>
           <p:nvPr/>
         </p:nvSpPr>
         <p:spPr>
           <a:xfrm>
-            <a:off x="853418" y="3749039"/>
-            <a:ext cx="6095847" cy="822960"/>
+            <a:off x="6827349" y="3886200"/>
+            <a:ext cx="4632844" cy="822960"/>
           </a:xfrm>
           <a:prstGeom prst="rect">
             <a:avLst/>
@@ -3383,9 +3480,9 @@
               </a:lnSpc>
             </a:pPr>
             <a:r>
-              <a:rPr sz="1700" b="0" i="1">
+              <a:rPr sz="1700" b="0" i="0">
                 <a:solidFill>
-                  <a:srgbClr val="216E21"/>
+                  <a:srgbClr val="26231F"/>
                 </a:solidFill>
               </a:rPr>
               <a:t>저희 아이의 첫 생일에 모십니다</a:t>
@@ -3395,14 +3492,14 @@
       </p:sp>
       <p:sp>
         <p:nvSpPr>
-          <p:cNvPr id="5" name="안내 문구"/>
+          <p:cNvPr id="7" name="안내 문구"/>
           <p:cNvSpPr txBox="1"/>
           <p:nvPr/>
         </p:nvSpPr>
         <p:spPr>
           <a:xfrm>
-            <a:off x="853418" y="4617720"/>
-            <a:ext cx="6095847" cy="914400"/>
+            <a:off x="6827349" y="4754880"/>
+            <a:ext cx="4632844" cy="914400"/>
           </a:xfrm>
           <a:prstGeom prst="rect">
             <a:avLst/>
@@ -3423,10 +3520,10 @@
             <a:r>
               <a:rPr sz="1400" b="0" i="0">
                 <a:solidFill>
-                  <a:srgbClr val="666666"/>
+                  <a:srgbClr val="26231F"/>
                 </a:solidFill>
               </a:rPr>
-              <a:t>아기 이름 · 2027. 00. 00</a:t>
+              <a:t>아기 이름 · 날짜 입력</a:t>
             </a:r>
           </a:p>
           <a:p>
@@ -3438,7 +3535,7 @@
             <a:r>
               <a:rPr sz="1400" b="0" i="0">
                 <a:solidFill>
-                  <a:srgbClr val="666666"/>
+                  <a:srgbClr val="26231F"/>
                 </a:solidFill>
               </a:rPr>
               <a:t>장소를 입력하세요</a:t>
@@ -3460,7 +3557,7 @@
     <p:bg>
       <p:bgPr>
         <a:solidFill>
-          <a:srgbClr val="F3FCF3"/>
+          <a:srgbClr val="FFFFFF"/>
         </a:solidFill>
         <a:effectLst/>
       </p:bgPr>
@@ -3480,14 +3577,16 @@
         </p:nvSpPr>
         <p:spPr>
           <a:xfrm>
-            <a:off x="0" y="0"/>
-            <a:ext cx="12191695" cy="274320"/>
-          </a:xfrm>
-          <a:prstGeom prst="rect">
-            <a:avLst/>
+            <a:off x="640080" y="566928"/>
+            <a:ext cx="64008" cy="868680"/>
+          </a:xfrm>
+          <a:prstGeom prst="roundRect">
+            <a:avLst>
+              <a:gd name="adj" fmla="val 50000"/>
+            </a:avLst>
           </a:prstGeom>
           <a:solidFill>
-            <a:srgbClr val="4ECA4E"/>
+            <a:srgbClr val="97ED97"/>
           </a:solidFill>
           <a:ln>
             <a:noFill/>
@@ -3503,20 +3602,58 @@
       </p:sp>
       <p:sp>
         <p:nvSpPr>
-          <p:cNvPr id="4" name="장식"/>
-          <p:cNvSpPr/>
+          <p:cNvPr id="4" name="상단 라벨"/>
+          <p:cNvSpPr txBox="1"/>
           <p:nvPr/>
         </p:nvSpPr>
         <p:spPr>
           <a:xfrm>
-            <a:off x="0" y="274320"/>
-            <a:ext cx="12191695" cy="54864"/>
+            <a:off x="868680" y="274320"/>
+            <a:ext cx="5486400" cy="274320"/>
           </a:xfrm>
           <a:prstGeom prst="rect">
             <a:avLst/>
           </a:prstGeom>
+          <a:noFill/>
+        </p:spPr>
+        <p:txBody>
+          <a:bodyPr wrap="square" lIns="54864" rIns="54864" tIns="27432" bIns="27432" anchor="ctr">
+            <a:noAutofit/>
+          </a:bodyPr>
+          <a:lstStyle/>
+          <a:p>
+            <a:pPr algn="l">
+              <a:lnSpc>
+                <a:spcPct val="115000"/>
+              </a:lnSpc>
+            </a:pPr>
+            <a:r>
+              <a:rPr sz="900" b="1" i="0" spc="250">
+                <a:solidFill>
+                  <a:srgbClr val="8E8780"/>
+                </a:solidFill>
+              </a:rPr>
+              <a:t>FIRST BIRTHDAY</a:t>
+            </a:r>
+          </a:p>
+        </p:txBody>
+      </p:sp>
+      <p:sp>
+        <p:nvSpPr>
+          <p:cNvPr id="5" name="포인트"/>
+          <p:cNvSpPr/>
+          <p:nvPr/>
+        </p:nvSpPr>
+        <p:spPr>
+          <a:xfrm>
+            <a:off x="11167567" y="667512"/>
+            <a:ext cx="310896" cy="310896"/>
+          </a:xfrm>
+          <a:prstGeom prst="donut">
+            <a:avLst/>
+          </a:prstGeom>
           <a:solidFill>
-            <a:srgbClr val="339941"/>
+            <a:srgbClr val="A6F2A6"/>
           </a:solidFill>
           <a:ln>
             <a:noFill/>
@@ -3542,8 +3679,8 @@
         </p:nvSpPr>
         <p:spPr>
           <a:xfrm>
-            <a:off x="640080" y="457200"/>
-            <a:ext cx="9722815" cy="868680"/>
+            <a:off x="868680" y="566928"/>
+            <a:ext cx="9448495" cy="868680"/>
           </a:xfrm>
         </p:spPr>
         <p:txBody>
@@ -3560,7 +3697,7 @@
             <a:r>
               <a:rPr sz="3000" b="1" i="0">
                 <a:solidFill>
-                  <a:srgbClr val="216E21"/>
+                  <a:srgbClr val="26231F"/>
                 </a:solidFill>
               </a:rPr>
               <a:t>우리 아기를 소개합니다</a:t>
@@ -3570,14 +3707,14 @@
       </p:sp>
       <p:sp>
         <p:nvSpPr>
-          <p:cNvPr id="5" name="사진 자리"/>
+          <p:cNvPr id="6" name="사진 자리"/>
           <p:cNvSpPr/>
           <p:nvPr/>
         </p:nvSpPr>
         <p:spPr>
           <a:xfrm>
-            <a:off x="640080" y="1600200"/>
-            <a:ext cx="3840480" cy="4617720"/>
+            <a:off x="640080" y="1783080"/>
+            <a:ext cx="3840480" cy="4389120"/>
           </a:xfrm>
           <a:prstGeom prst="roundRect">
             <a:avLst>
@@ -3585,12 +3722,10 @@
             </a:avLst>
           </a:prstGeom>
           <a:solidFill>
-            <a:srgbClr val="D4F7D4"/>
+            <a:srgbClr val="D1FAD1"/>
           </a:solidFill>
           <a:ln w="19050">
-            <a:solidFill>
-              <a:srgbClr val="4ECA4E"/>
-            </a:solidFill>
+            <a:noFill/>
             <a:prstDash val="dash"/>
           </a:ln>
         </p:spPr>
@@ -3608,7 +3743,7 @@
             <a:r>
               <a:rPr sz="1400" b="0" i="0">
                 <a:solidFill>
-                  <a:srgbClr val="216E21"/>
+                  <a:srgbClr val="8E8780"/>
                 </a:solidFill>
               </a:rPr>
               <a:t>아기 사진을 넣어 주세요</a:t>
@@ -3618,14 +3753,14 @@
       </p:sp>
       <p:graphicFrame>
         <p:nvGraphicFramePr>
-          <p:cNvPr id="6" name="표"/>
+          <p:cNvPr id="7" name="표"/>
           <p:cNvGraphicFramePr>
             <a:graphicFrameLocks noGrp="1"/>
           </p:cNvGraphicFramePr>
           <p:nvPr/>
         </p:nvGraphicFramePr>
         <p:xfrm>
-          <a:off x="4846320" y="1600200"/>
+          <a:off x="4846320" y="1783080"/>
           <a:ext cx="6705295" cy="3950208"/>
         </p:xfrm>
         <a:graphic>
@@ -3648,7 +3783,7 @@
                       <a:r>
                         <a:rPr sz="1500" b="1">
                           <a:solidFill>
-                            <a:srgbClr val="216E21"/>
+                            <a:srgbClr val="274927"/>
                           </a:solidFill>
                         </a:rPr>
                         <a:t>이름</a:t>
@@ -3658,30 +3793,30 @@
                   <a:tcPr anchor="ctr" marL="73152" marR="73152">
                     <a:lnL w="9525" cap="flat" cmpd="sng" algn="ctr">
                       <a:solidFill>
-                        <a:srgbClr val="D4F7D4"/>
+                        <a:srgbClr val="D1FAD1"/>
                       </a:solidFill>
                       <a:prstDash val="solid"/>
                     </a:lnL>
                     <a:lnR w="9525" cap="flat" cmpd="sng" algn="ctr">
                       <a:solidFill>
-                        <a:srgbClr val="D4F7D4"/>
+                        <a:srgbClr val="D1FAD1"/>
                       </a:solidFill>
                       <a:prstDash val="solid"/>
                     </a:lnR>
                     <a:lnT w="9525" cap="flat" cmpd="sng" algn="ctr">
                       <a:solidFill>
-                        <a:srgbClr val="D4F7D4"/>
+                        <a:srgbClr val="D1FAD1"/>
                       </a:solidFill>
                       <a:prstDash val="solid"/>
                     </a:lnT>
                     <a:lnB w="9525" cap="flat" cmpd="sng" algn="ctr">
                       <a:solidFill>
-                        <a:srgbClr val="D4F7D4"/>
+                        <a:srgbClr val="D1FAD1"/>
                       </a:solidFill>
                       <a:prstDash val="solid"/>
                     </a:lnB>
                     <a:solidFill>
-                      <a:srgbClr val="D4F7D4"/>
+                      <a:srgbClr val="D1FAD1"/>
                     </a:solidFill>
                   </a:tcPr>
                 </a:tc>
@@ -3694,7 +3829,7 @@
                       <a:r>
                         <a:rPr sz="1500" b="0">
                           <a:solidFill>
-                            <a:srgbClr val="2B2B2B"/>
+                            <a:srgbClr val="26231F"/>
                           </a:solidFill>
                         </a:rPr>
                         <a:t>입력하세요</a:t>
@@ -3704,30 +3839,30 @@
                   <a:tcPr anchor="ctr" marL="73152" marR="73152">
                     <a:lnL w="9525" cap="flat" cmpd="sng" algn="ctr">
                       <a:solidFill>
-                        <a:srgbClr val="D4F7D4"/>
+                        <a:srgbClr val="D1FAD1"/>
                       </a:solidFill>
                       <a:prstDash val="solid"/>
                     </a:lnL>
                     <a:lnR w="9525" cap="flat" cmpd="sng" algn="ctr">
                       <a:solidFill>
-                        <a:srgbClr val="D4F7D4"/>
+                        <a:srgbClr val="D1FAD1"/>
                       </a:solidFill>
                       <a:prstDash val="solid"/>
                     </a:lnR>
                     <a:lnT w="9525" cap="flat" cmpd="sng" algn="ctr">
                       <a:solidFill>
-                        <a:srgbClr val="D4F7D4"/>
+                        <a:srgbClr val="D1FAD1"/>
                       </a:solidFill>
                       <a:prstDash val="solid"/>
                     </a:lnT>
                     <a:lnB w="9525" cap="flat" cmpd="sng" algn="ctr">
                       <a:solidFill>
-                        <a:srgbClr val="D4F7D4"/>
+                        <a:srgbClr val="D1FAD1"/>
                       </a:solidFill>
                       <a:prstDash val="solid"/>
                     </a:lnB>
                     <a:solidFill>
-                      <a:srgbClr val="F3FCF3"/>
+                      <a:srgbClr val="EAFDEA"/>
                     </a:solidFill>
                   </a:tcPr>
                 </a:tc>
@@ -3742,7 +3877,7 @@
                       <a:r>
                         <a:rPr sz="1500" b="1">
                           <a:solidFill>
-                            <a:srgbClr val="216E21"/>
+                            <a:srgbClr val="274927"/>
                           </a:solidFill>
                         </a:rPr>
                         <a:t>생일</a:t>
@@ -3752,30 +3887,30 @@
                   <a:tcPr anchor="ctr" marL="73152" marR="73152">
                     <a:lnL w="9525" cap="flat" cmpd="sng" algn="ctr">
                       <a:solidFill>
-                        <a:srgbClr val="D4F7D4"/>
+                        <a:srgbClr val="D1FAD1"/>
                       </a:solidFill>
                       <a:prstDash val="solid"/>
                     </a:lnL>
                     <a:lnR w="9525" cap="flat" cmpd="sng" algn="ctr">
                       <a:solidFill>
-                        <a:srgbClr val="D4F7D4"/>
+                        <a:srgbClr val="D1FAD1"/>
                       </a:solidFill>
                       <a:prstDash val="solid"/>
                     </a:lnR>
                     <a:lnT w="9525" cap="flat" cmpd="sng" algn="ctr">
                       <a:solidFill>
-                        <a:srgbClr val="D4F7D4"/>
+                        <a:srgbClr val="D1FAD1"/>
                       </a:solidFill>
                       <a:prstDash val="solid"/>
                     </a:lnT>
                     <a:lnB w="9525" cap="flat" cmpd="sng" algn="ctr">
                       <a:solidFill>
-                        <a:srgbClr val="D4F7D4"/>
+                        <a:srgbClr val="D1FAD1"/>
                       </a:solidFill>
                       <a:prstDash val="solid"/>
                     </a:lnB>
                     <a:solidFill>
-                      <a:srgbClr val="D4F7D4"/>
+                      <a:srgbClr val="D1FAD1"/>
                     </a:solidFill>
                   </a:tcPr>
                 </a:tc>
@@ -3788,7 +3923,7 @@
                       <a:r>
                         <a:rPr sz="1500" b="0">
                           <a:solidFill>
-                            <a:srgbClr val="2B2B2B"/>
+                            <a:srgbClr val="26231F"/>
                           </a:solidFill>
                         </a:rPr>
                         <a:t>입력하세요</a:t>
@@ -3798,25 +3933,25 @@
                   <a:tcPr anchor="ctr" marL="73152" marR="73152">
                     <a:lnL w="9525" cap="flat" cmpd="sng" algn="ctr">
                       <a:solidFill>
-                        <a:srgbClr val="D4F7D4"/>
+                        <a:srgbClr val="D1FAD1"/>
                       </a:solidFill>
                       <a:prstDash val="solid"/>
                     </a:lnL>
                     <a:lnR w="9525" cap="flat" cmpd="sng" algn="ctr">
                       <a:solidFill>
-                        <a:srgbClr val="D4F7D4"/>
+                        <a:srgbClr val="D1FAD1"/>
                       </a:solidFill>
                       <a:prstDash val="solid"/>
                     </a:lnR>
                     <a:lnT w="9525" cap="flat" cmpd="sng" algn="ctr">
                       <a:solidFill>
-                        <a:srgbClr val="D4F7D4"/>
+                        <a:srgbClr val="D1FAD1"/>
                       </a:solidFill>
                       <a:prstDash val="solid"/>
                     </a:lnT>
                     <a:lnB w="9525" cap="flat" cmpd="sng" algn="ctr">
                       <a:solidFill>
-                        <a:srgbClr val="D4F7D4"/>
+                        <a:srgbClr val="D1FAD1"/>
                       </a:solidFill>
                       <a:prstDash val="solid"/>
                     </a:lnB>
@@ -3836,7 +3971,7 @@
                       <a:r>
                         <a:rPr sz="1500" b="1">
                           <a:solidFill>
-                            <a:srgbClr val="216E21"/>
+                            <a:srgbClr val="274927"/>
                           </a:solidFill>
                         </a:rPr>
                         <a:t>키 · 몸무게</a:t>
@@ -3846,30 +3981,30 @@
                   <a:tcPr anchor="ctr" marL="73152" marR="73152">
                     <a:lnL w="9525" cap="flat" cmpd="sng" algn="ctr">
                       <a:solidFill>
-                        <a:srgbClr val="D4F7D4"/>
+                        <a:srgbClr val="D1FAD1"/>
                       </a:solidFill>
                       <a:prstDash val="solid"/>
                     </a:lnL>
                     <a:lnR w="9525" cap="flat" cmpd="sng" algn="ctr">
                       <a:solidFill>
-                        <a:srgbClr val="D4F7D4"/>
+                        <a:srgbClr val="D1FAD1"/>
                       </a:solidFill>
                       <a:prstDash val="solid"/>
                     </a:lnR>
                     <a:lnT w="9525" cap="flat" cmpd="sng" algn="ctr">
                       <a:solidFill>
-                        <a:srgbClr val="D4F7D4"/>
+                        <a:srgbClr val="D1FAD1"/>
                       </a:solidFill>
                       <a:prstDash val="solid"/>
                     </a:lnT>
                     <a:lnB w="9525" cap="flat" cmpd="sng" algn="ctr">
                       <a:solidFill>
-                        <a:srgbClr val="D4F7D4"/>
+                        <a:srgbClr val="D1FAD1"/>
                       </a:solidFill>
                       <a:prstDash val="solid"/>
                     </a:lnB>
                     <a:solidFill>
-                      <a:srgbClr val="D4F7D4"/>
+                      <a:srgbClr val="D1FAD1"/>
                     </a:solidFill>
                   </a:tcPr>
                 </a:tc>
@@ -3882,7 +4017,7 @@
                       <a:r>
                         <a:rPr sz="1500" b="0">
                           <a:solidFill>
-                            <a:srgbClr val="2B2B2B"/>
+                            <a:srgbClr val="26231F"/>
                           </a:solidFill>
                         </a:rPr>
                         <a:t>입력하세요</a:t>
@@ -3892,30 +4027,30 @@
                   <a:tcPr anchor="ctr" marL="73152" marR="73152">
                     <a:lnL w="9525" cap="flat" cmpd="sng" algn="ctr">
                       <a:solidFill>
-                        <a:srgbClr val="D4F7D4"/>
+                        <a:srgbClr val="D1FAD1"/>
                       </a:solidFill>
                       <a:prstDash val="solid"/>
                     </a:lnL>
                     <a:lnR w="9525" cap="flat" cmpd="sng" algn="ctr">
                       <a:solidFill>
-                        <a:srgbClr val="D4F7D4"/>
+                        <a:srgbClr val="D1FAD1"/>
                       </a:solidFill>
                       <a:prstDash val="solid"/>
                     </a:lnR>
                     <a:lnT w="9525" cap="flat" cmpd="sng" algn="ctr">
                       <a:solidFill>
-                        <a:srgbClr val="D4F7D4"/>
+                        <a:srgbClr val="D1FAD1"/>
                       </a:solidFill>
                       <a:prstDash val="solid"/>
                     </a:lnT>
                     <a:lnB w="9525" cap="flat" cmpd="sng" algn="ctr">
                       <a:solidFill>
-                        <a:srgbClr val="D4F7D4"/>
+                        <a:srgbClr val="D1FAD1"/>
                       </a:solidFill>
                       <a:prstDash val="solid"/>
                     </a:lnB>
                     <a:solidFill>
-                      <a:srgbClr val="F3FCF3"/>
+                      <a:srgbClr val="EAFDEA"/>
                     </a:solidFill>
                   </a:tcPr>
                 </a:tc>
@@ -3930,7 +4065,7 @@
                       <a:r>
                         <a:rPr sz="1500" b="1">
                           <a:solidFill>
-                            <a:srgbClr val="216E21"/>
+                            <a:srgbClr val="274927"/>
                           </a:solidFill>
                         </a:rPr>
                         <a:t>좋아하는 것</a:t>
@@ -3940,30 +4075,30 @@
                   <a:tcPr anchor="ctr" marL="73152" marR="73152">
                     <a:lnL w="9525" cap="flat" cmpd="sng" algn="ctr">
                       <a:solidFill>
-                        <a:srgbClr val="D4F7D4"/>
+                        <a:srgbClr val="D1FAD1"/>
                       </a:solidFill>
                       <a:prstDash val="solid"/>
                     </a:lnL>
                     <a:lnR w="9525" cap="flat" cmpd="sng" algn="ctr">
                       <a:solidFill>
-                        <a:srgbClr val="D4F7D4"/>
+                        <a:srgbClr val="D1FAD1"/>
                       </a:solidFill>
                       <a:prstDash val="solid"/>
                     </a:lnR>
                     <a:lnT w="9525" cap="flat" cmpd="sng" algn="ctr">
                       <a:solidFill>
-                        <a:srgbClr val="D4F7D4"/>
+                        <a:srgbClr val="D1FAD1"/>
                       </a:solidFill>
                       <a:prstDash val="solid"/>
                     </a:lnT>
                     <a:lnB w="9525" cap="flat" cmpd="sng" algn="ctr">
                       <a:solidFill>
-                        <a:srgbClr val="D4F7D4"/>
+                        <a:srgbClr val="D1FAD1"/>
                       </a:solidFill>
                       <a:prstDash val="solid"/>
                     </a:lnB>
                     <a:solidFill>
-                      <a:srgbClr val="D4F7D4"/>
+                      <a:srgbClr val="D1FAD1"/>
                     </a:solidFill>
                   </a:tcPr>
                 </a:tc>
@@ -3976,7 +4111,7 @@
                       <a:r>
                         <a:rPr sz="1500" b="0">
                           <a:solidFill>
-                            <a:srgbClr val="2B2B2B"/>
+                            <a:srgbClr val="26231F"/>
                           </a:solidFill>
                         </a:rPr>
                         <a:t>입력하세요</a:t>
@@ -3986,25 +4121,25 @@
                   <a:tcPr anchor="ctr" marL="73152" marR="73152">
                     <a:lnL w="9525" cap="flat" cmpd="sng" algn="ctr">
                       <a:solidFill>
-                        <a:srgbClr val="D4F7D4"/>
+                        <a:srgbClr val="D1FAD1"/>
                       </a:solidFill>
                       <a:prstDash val="solid"/>
                     </a:lnL>
                     <a:lnR w="9525" cap="flat" cmpd="sng" algn="ctr">
                       <a:solidFill>
-                        <a:srgbClr val="D4F7D4"/>
+                        <a:srgbClr val="D1FAD1"/>
                       </a:solidFill>
                       <a:prstDash val="solid"/>
                     </a:lnR>
                     <a:lnT w="9525" cap="flat" cmpd="sng" algn="ctr">
                       <a:solidFill>
-                        <a:srgbClr val="D4F7D4"/>
+                        <a:srgbClr val="D1FAD1"/>
                       </a:solidFill>
                       <a:prstDash val="solid"/>
                     </a:lnT>
                     <a:lnB w="9525" cap="flat" cmpd="sng" algn="ctr">
                       <a:solidFill>
-                        <a:srgbClr val="D4F7D4"/>
+                        <a:srgbClr val="D1FAD1"/>
                       </a:solidFill>
                       <a:prstDash val="solid"/>
                     </a:lnB>
@@ -4024,7 +4159,7 @@
                       <a:r>
                         <a:rPr sz="1500" b="1">
                           <a:solidFill>
-                            <a:srgbClr val="216E21"/>
+                            <a:srgbClr val="274927"/>
                           </a:solidFill>
                         </a:rPr>
                         <a:t>별명</a:t>
@@ -4034,30 +4169,30 @@
                   <a:tcPr anchor="ctr" marL="73152" marR="73152">
                     <a:lnL w="9525" cap="flat" cmpd="sng" algn="ctr">
                       <a:solidFill>
-                        <a:srgbClr val="D4F7D4"/>
+                        <a:srgbClr val="D1FAD1"/>
                       </a:solidFill>
                       <a:prstDash val="solid"/>
                     </a:lnL>
                     <a:lnR w="9525" cap="flat" cmpd="sng" algn="ctr">
                       <a:solidFill>
-                        <a:srgbClr val="D4F7D4"/>
+                        <a:srgbClr val="D1FAD1"/>
                       </a:solidFill>
                       <a:prstDash val="solid"/>
                     </a:lnR>
                     <a:lnT w="9525" cap="flat" cmpd="sng" algn="ctr">
                       <a:solidFill>
-                        <a:srgbClr val="D4F7D4"/>
+                        <a:srgbClr val="D1FAD1"/>
                       </a:solidFill>
                       <a:prstDash val="solid"/>
                     </a:lnT>
                     <a:lnB w="9525" cap="flat" cmpd="sng" algn="ctr">
                       <a:solidFill>
-                        <a:srgbClr val="D4F7D4"/>
+                        <a:srgbClr val="D1FAD1"/>
                       </a:solidFill>
                       <a:prstDash val="solid"/>
                     </a:lnB>
                     <a:solidFill>
-                      <a:srgbClr val="D4F7D4"/>
+                      <a:srgbClr val="D1FAD1"/>
                     </a:solidFill>
                   </a:tcPr>
                 </a:tc>
@@ -4070,7 +4205,7 @@
                       <a:r>
                         <a:rPr sz="1500" b="0">
                           <a:solidFill>
-                            <a:srgbClr val="2B2B2B"/>
+                            <a:srgbClr val="26231F"/>
                           </a:solidFill>
                         </a:rPr>
                         <a:t>입력하세요</a:t>
@@ -4080,30 +4215,30 @@
                   <a:tcPr anchor="ctr" marL="73152" marR="73152">
                     <a:lnL w="9525" cap="flat" cmpd="sng" algn="ctr">
                       <a:solidFill>
-                        <a:srgbClr val="D4F7D4"/>
+                        <a:srgbClr val="D1FAD1"/>
                       </a:solidFill>
                       <a:prstDash val="solid"/>
                     </a:lnL>
                     <a:lnR w="9525" cap="flat" cmpd="sng" algn="ctr">
                       <a:solidFill>
-                        <a:srgbClr val="D4F7D4"/>
+                        <a:srgbClr val="D1FAD1"/>
                       </a:solidFill>
                       <a:prstDash val="solid"/>
                     </a:lnR>
                     <a:lnT w="9525" cap="flat" cmpd="sng" algn="ctr">
                       <a:solidFill>
-                        <a:srgbClr val="D4F7D4"/>
+                        <a:srgbClr val="D1FAD1"/>
                       </a:solidFill>
                       <a:prstDash val="solid"/>
                     </a:lnT>
                     <a:lnB w="9525" cap="flat" cmpd="sng" algn="ctr">
                       <a:solidFill>
-                        <a:srgbClr val="D4F7D4"/>
+                        <a:srgbClr val="D1FAD1"/>
                       </a:solidFill>
                       <a:prstDash val="solid"/>
                     </a:lnB>
                     <a:solidFill>
-                      <a:srgbClr val="F3FCF3"/>
+                      <a:srgbClr val="EAFDEA"/>
                     </a:solidFill>
                   </a:tcPr>
                 </a:tc>
@@ -4118,7 +4253,7 @@
                       <a:r>
                         <a:rPr sz="1500" b="1">
                           <a:solidFill>
-                            <a:srgbClr val="216E21"/>
+                            <a:srgbClr val="274927"/>
                           </a:solidFill>
                         </a:rPr>
                         <a:t>부모의 마음</a:t>
@@ -4128,30 +4263,30 @@
                   <a:tcPr anchor="ctr" marL="73152" marR="73152">
                     <a:lnL w="9525" cap="flat" cmpd="sng" algn="ctr">
                       <a:solidFill>
-                        <a:srgbClr val="D4F7D4"/>
+                        <a:srgbClr val="D1FAD1"/>
                       </a:solidFill>
                       <a:prstDash val="solid"/>
                     </a:lnL>
                     <a:lnR w="9525" cap="flat" cmpd="sng" algn="ctr">
                       <a:solidFill>
-                        <a:srgbClr val="D4F7D4"/>
+                        <a:srgbClr val="D1FAD1"/>
                       </a:solidFill>
                       <a:prstDash val="solid"/>
                     </a:lnR>
                     <a:lnT w="9525" cap="flat" cmpd="sng" algn="ctr">
                       <a:solidFill>
-                        <a:srgbClr val="D4F7D4"/>
+                        <a:srgbClr val="D1FAD1"/>
                       </a:solidFill>
                       <a:prstDash val="solid"/>
                     </a:lnT>
                     <a:lnB w="9525" cap="flat" cmpd="sng" algn="ctr">
                       <a:solidFill>
-                        <a:srgbClr val="D4F7D4"/>
+                        <a:srgbClr val="D1FAD1"/>
                       </a:solidFill>
                       <a:prstDash val="solid"/>
                     </a:lnB>
                     <a:solidFill>
-                      <a:srgbClr val="D4F7D4"/>
+                      <a:srgbClr val="D1FAD1"/>
                     </a:solidFill>
                   </a:tcPr>
                 </a:tc>
@@ -4164,7 +4299,7 @@
                       <a:r>
                         <a:rPr sz="1500" b="0">
                           <a:solidFill>
-                            <a:srgbClr val="2B2B2B"/>
+                            <a:srgbClr val="26231F"/>
                           </a:solidFill>
                         </a:rPr>
                         <a:t>입력하세요</a:t>
@@ -4174,25 +4309,25 @@
                   <a:tcPr anchor="ctr" marL="73152" marR="73152">
                     <a:lnL w="9525" cap="flat" cmpd="sng" algn="ctr">
                       <a:solidFill>
-                        <a:srgbClr val="D4F7D4"/>
+                        <a:srgbClr val="D1FAD1"/>
                       </a:solidFill>
                       <a:prstDash val="solid"/>
                     </a:lnL>
                     <a:lnR w="9525" cap="flat" cmpd="sng" algn="ctr">
                       <a:solidFill>
-                        <a:srgbClr val="D4F7D4"/>
+                        <a:srgbClr val="D1FAD1"/>
                       </a:solidFill>
                       <a:prstDash val="solid"/>
                     </a:lnR>
                     <a:lnT w="9525" cap="flat" cmpd="sng" algn="ctr">
                       <a:solidFill>
-                        <a:srgbClr val="D4F7D4"/>
+                        <a:srgbClr val="D1FAD1"/>
                       </a:solidFill>
                       <a:prstDash val="solid"/>
                     </a:lnT>
                     <a:lnB w="9525" cap="flat" cmpd="sng" algn="ctr">
                       <a:solidFill>
-                        <a:srgbClr val="D4F7D4"/>
+                        <a:srgbClr val="D1FAD1"/>
                       </a:solidFill>
                       <a:prstDash val="solid"/>
                     </a:lnB>
@@ -4220,7 +4355,7 @@
     <p:bg>
       <p:bgPr>
         <a:solidFill>
-          <a:srgbClr val="F3FCF3"/>
+          <a:srgbClr val="FFFFFF"/>
         </a:solidFill>
         <a:effectLst/>
       </p:bgPr>
@@ -4240,14 +4375,16 @@
         </p:nvSpPr>
         <p:spPr>
           <a:xfrm>
-            <a:off x="0" y="0"/>
-            <a:ext cx="12191695" cy="274320"/>
-          </a:xfrm>
-          <a:prstGeom prst="rect">
-            <a:avLst/>
+            <a:off x="640080" y="566928"/>
+            <a:ext cx="64008" cy="868680"/>
+          </a:xfrm>
+          <a:prstGeom prst="roundRect">
+            <a:avLst>
+              <a:gd name="adj" fmla="val 50000"/>
+            </a:avLst>
           </a:prstGeom>
           <a:solidFill>
-            <a:srgbClr val="4ECA4E"/>
+            <a:srgbClr val="97ED97"/>
           </a:solidFill>
           <a:ln>
             <a:noFill/>
@@ -4263,20 +4400,58 @@
       </p:sp>
       <p:sp>
         <p:nvSpPr>
-          <p:cNvPr id="4" name="장식"/>
-          <p:cNvSpPr/>
+          <p:cNvPr id="4" name="상단 라벨"/>
+          <p:cNvSpPr txBox="1"/>
           <p:nvPr/>
         </p:nvSpPr>
         <p:spPr>
           <a:xfrm>
-            <a:off x="0" y="274320"/>
-            <a:ext cx="12191695" cy="54864"/>
+            <a:off x="868680" y="274320"/>
+            <a:ext cx="5486400" cy="274320"/>
           </a:xfrm>
           <a:prstGeom prst="rect">
             <a:avLst/>
           </a:prstGeom>
+          <a:noFill/>
+        </p:spPr>
+        <p:txBody>
+          <a:bodyPr wrap="square" lIns="54864" rIns="54864" tIns="27432" bIns="27432" anchor="ctr">
+            <a:noAutofit/>
+          </a:bodyPr>
+          <a:lstStyle/>
+          <a:p>
+            <a:pPr algn="l">
+              <a:lnSpc>
+                <a:spcPct val="115000"/>
+              </a:lnSpc>
+            </a:pPr>
+            <a:r>
+              <a:rPr sz="900" b="1" i="0" spc="250">
+                <a:solidFill>
+                  <a:srgbClr val="8E8780"/>
+                </a:solidFill>
+              </a:rPr>
+              <a:t>FIRST BIRTHDAY</a:t>
+            </a:r>
+          </a:p>
+        </p:txBody>
+      </p:sp>
+      <p:sp>
+        <p:nvSpPr>
+          <p:cNvPr id="5" name="포인트"/>
+          <p:cNvSpPr/>
+          <p:nvPr/>
+        </p:nvSpPr>
+        <p:spPr>
+          <a:xfrm>
+            <a:off x="11167567" y="667512"/>
+            <a:ext cx="310896" cy="310896"/>
+          </a:xfrm>
+          <a:prstGeom prst="donut">
+            <a:avLst/>
+          </a:prstGeom>
           <a:solidFill>
-            <a:srgbClr val="339941"/>
+            <a:srgbClr val="A6F2A6"/>
           </a:solidFill>
           <a:ln>
             <a:noFill/>
@@ -4302,8 +4477,8 @@
         </p:nvSpPr>
         <p:spPr>
           <a:xfrm>
-            <a:off x="640080" y="457200"/>
-            <a:ext cx="9722815" cy="868680"/>
+            <a:off x="868680" y="566928"/>
+            <a:ext cx="9448495" cy="868680"/>
           </a:xfrm>
         </p:spPr>
         <p:txBody>
@@ -4320,7 +4495,7 @@
             <a:r>
               <a:rPr sz="3000" b="1" i="0">
                 <a:solidFill>
-                  <a:srgbClr val="216E21"/>
+                  <a:srgbClr val="26231F"/>
                 </a:solidFill>
               </a:rPr>
               <a:t>초대합니다</a:t>
@@ -4330,26 +4505,24 @@
       </p:sp>
       <p:sp>
         <p:nvSpPr>
-          <p:cNvPr id="5" name="초대 글 칸"/>
+          <p:cNvPr id="6" name="초대 글 칸"/>
           <p:cNvSpPr/>
           <p:nvPr/>
         </p:nvSpPr>
         <p:spPr>
           <a:xfrm>
-            <a:off x="640080" y="1600200"/>
-            <a:ext cx="10911535" cy="4800600"/>
+            <a:off x="640080" y="1783080"/>
+            <a:ext cx="10911535" cy="4572000"/>
           </a:xfrm>
           <a:prstGeom prst="roundRect">
             <a:avLst>
-              <a:gd name="adj" fmla="val 8000"/>
+              <a:gd name="adj" fmla="val 7000"/>
             </a:avLst>
           </a:prstGeom>
-          <a:solidFill>
-            <a:srgbClr val="F3FCF3"/>
-          </a:solidFill>
-          <a:ln w="12700">
+          <a:noFill/>
+          <a:ln w="15875">
             <a:solidFill>
-              <a:srgbClr val="D4F7D4"/>
+              <a:srgbClr val="97ED97"/>
             </a:solidFill>
           </a:ln>
         </p:spPr>
@@ -4363,14 +4536,14 @@
       </p:sp>
       <p:sp>
         <p:nvSpPr>
-          <p:cNvPr id="6" name="초대 글"/>
+          <p:cNvPr id="7" name="초대 글"/>
           <p:cNvSpPr txBox="1"/>
           <p:nvPr/>
         </p:nvSpPr>
         <p:spPr>
           <a:xfrm>
-            <a:off x="1097280" y="1965960"/>
-            <a:ext cx="9997135" cy="4069080"/>
+            <a:off x="1097280" y="2148840"/>
+            <a:ext cx="9997135" cy="3840480"/>
           </a:xfrm>
           <a:prstGeom prst="rect">
             <a:avLst/>
@@ -4391,7 +4564,7 @@
             <a:r>
               <a:rPr sz="2000" b="0" i="0">
                 <a:solidFill>
-                  <a:srgbClr val="2B2B2B"/>
+                  <a:srgbClr val="26231F"/>
                 </a:solidFill>
               </a:rPr>
               <a:t>저희 아이의 첫 생일에 모십니다.</a:t>
@@ -4406,7 +4579,7 @@
             <a:r>
               <a:rPr sz="2000" b="0" i="0">
                 <a:solidFill>
-                  <a:srgbClr val="2B2B2B"/>
+                  <a:srgbClr val="26231F"/>
                 </a:solidFill>
               </a:rPr>
               <a:t/>
@@ -4421,7 +4594,7 @@
             <a:r>
               <a:rPr sz="2000" b="0" i="0">
                 <a:solidFill>
-                  <a:srgbClr val="2B2B2B"/>
+                  <a:srgbClr val="26231F"/>
                 </a:solidFill>
               </a:rPr>
               <a:t>오셔서 같이 밥 한 끼 해 주세요.</a:t>
@@ -4436,7 +4609,7 @@
             <a:r>
               <a:rPr sz="2000" b="0" i="0">
                 <a:solidFill>
-                  <a:srgbClr val="2B2B2B"/>
+                  <a:srgbClr val="26231F"/>
                 </a:solidFill>
               </a:rPr>
               <a:t/>
@@ -4451,7 +4624,7 @@
             <a:r>
               <a:rPr sz="2000" b="0" i="0">
                 <a:solidFill>
-                  <a:srgbClr val="2B2B2B"/>
+                  <a:srgbClr val="26231F"/>
                 </a:solidFill>
               </a:rPr>
               <a:t>일시 · 장소를 입력하세요</a:t>
@@ -4473,7 +4646,7 @@
     <p:bg>
       <p:bgPr>
         <a:solidFill>
-          <a:srgbClr val="F3FCF3"/>
+          <a:srgbClr val="FFFFFF"/>
         </a:solidFill>
         <a:effectLst/>
       </p:bgPr>
@@ -4493,14 +4666,16 @@
         </p:nvSpPr>
         <p:spPr>
           <a:xfrm>
-            <a:off x="0" y="0"/>
-            <a:ext cx="12191695" cy="274320"/>
-          </a:xfrm>
-          <a:prstGeom prst="rect">
-            <a:avLst/>
+            <a:off x="640080" y="566928"/>
+            <a:ext cx="64008" cy="868680"/>
+          </a:xfrm>
+          <a:prstGeom prst="roundRect">
+            <a:avLst>
+              <a:gd name="adj" fmla="val 50000"/>
+            </a:avLst>
           </a:prstGeom>
           <a:solidFill>
-            <a:srgbClr val="4ECA4E"/>
+            <a:srgbClr val="97ED97"/>
           </a:solidFill>
           <a:ln>
             <a:noFill/>
@@ -4516,20 +4691,58 @@
       </p:sp>
       <p:sp>
         <p:nvSpPr>
-          <p:cNvPr id="4" name="장식"/>
-          <p:cNvSpPr/>
+          <p:cNvPr id="4" name="상단 라벨"/>
+          <p:cNvSpPr txBox="1"/>
           <p:nvPr/>
         </p:nvSpPr>
         <p:spPr>
           <a:xfrm>
-            <a:off x="0" y="274320"/>
-            <a:ext cx="12191695" cy="54864"/>
+            <a:off x="868680" y="274320"/>
+            <a:ext cx="5486400" cy="274320"/>
           </a:xfrm>
           <a:prstGeom prst="rect">
             <a:avLst/>
           </a:prstGeom>
+          <a:noFill/>
+        </p:spPr>
+        <p:txBody>
+          <a:bodyPr wrap="square" lIns="54864" rIns="54864" tIns="27432" bIns="27432" anchor="ctr">
+            <a:noAutofit/>
+          </a:bodyPr>
+          <a:lstStyle/>
+          <a:p>
+            <a:pPr algn="l">
+              <a:lnSpc>
+                <a:spcPct val="115000"/>
+              </a:lnSpc>
+            </a:pPr>
+            <a:r>
+              <a:rPr sz="900" b="1" i="0" spc="250">
+                <a:solidFill>
+                  <a:srgbClr val="8E8780"/>
+                </a:solidFill>
+              </a:rPr>
+              <a:t>FIRST BIRTHDAY</a:t>
+            </a:r>
+          </a:p>
+        </p:txBody>
+      </p:sp>
+      <p:sp>
+        <p:nvSpPr>
+          <p:cNvPr id="5" name="포인트"/>
+          <p:cNvSpPr/>
+          <p:nvPr/>
+        </p:nvSpPr>
+        <p:spPr>
+          <a:xfrm>
+            <a:off x="11167567" y="667512"/>
+            <a:ext cx="310896" cy="310896"/>
+          </a:xfrm>
+          <a:prstGeom prst="donut">
+            <a:avLst/>
+          </a:prstGeom>
           <a:solidFill>
-            <a:srgbClr val="339941"/>
+            <a:srgbClr val="A6F2A6"/>
           </a:solidFill>
           <a:ln>
             <a:noFill/>
@@ -4555,8 +4768,8 @@
         </p:nvSpPr>
         <p:spPr>
           <a:xfrm>
-            <a:off x="640080" y="457200"/>
-            <a:ext cx="9722815" cy="868680"/>
+            <a:off x="868680" y="566928"/>
+            <a:ext cx="9448495" cy="868680"/>
           </a:xfrm>
         </p:spPr>
         <p:txBody>
@@ -4573,7 +4786,7 @@
             <a:r>
               <a:rPr sz="3000" b="1" i="0">
                 <a:solidFill>
-                  <a:srgbClr val="216E21"/>
+                  <a:srgbClr val="26231F"/>
                 </a:solidFill>
               </a:rPr>
               <a:t>부모의 한마디</a:t>
@@ -4583,26 +4796,24 @@
       </p:sp>
       <p:sp>
         <p:nvSpPr>
-          <p:cNvPr id="5" name="편지 칸"/>
+          <p:cNvPr id="6" name="편지 칸"/>
           <p:cNvSpPr/>
           <p:nvPr/>
         </p:nvSpPr>
         <p:spPr>
           <a:xfrm>
-            <a:off x="640080" y="1600200"/>
-            <a:ext cx="10911535" cy="4800600"/>
+            <a:off x="640080" y="1783080"/>
+            <a:ext cx="10911535" cy="4572000"/>
           </a:xfrm>
           <a:prstGeom prst="roundRect">
             <a:avLst>
-              <a:gd name="adj" fmla="val 8000"/>
+              <a:gd name="adj" fmla="val 7000"/>
             </a:avLst>
           </a:prstGeom>
-          <a:solidFill>
-            <a:srgbClr val="D4F7D4"/>
-          </a:solidFill>
-          <a:ln w="12700">
+          <a:noFill/>
+          <a:ln w="15875">
             <a:solidFill>
-              <a:srgbClr val="4ECA4E"/>
+              <a:srgbClr val="97ED97"/>
             </a:solidFill>
           </a:ln>
         </p:spPr>
@@ -4616,14 +4827,14 @@
       </p:sp>
       <p:sp>
         <p:nvSpPr>
-          <p:cNvPr id="6" name="편지 글"/>
+          <p:cNvPr id="7" name="편지 글"/>
           <p:cNvSpPr txBox="1"/>
           <p:nvPr/>
         </p:nvSpPr>
         <p:spPr>
           <a:xfrm>
-            <a:off x="1097280" y="1965960"/>
-            <a:ext cx="9997135" cy="4069080"/>
+            <a:off x="1097280" y="2148840"/>
+            <a:ext cx="9997135" cy="3840480"/>
           </a:xfrm>
           <a:prstGeom prst="rect">
             <a:avLst/>
@@ -4644,7 +4855,7 @@
             <a:r>
               <a:rPr sz="2000" b="0" i="0">
                 <a:solidFill>
-                  <a:srgbClr val="2B2B2B"/>
+                  <a:srgbClr val="26231F"/>
                 </a:solidFill>
               </a:rPr>
               <a:t>사랑하는 우리 아기에게</a:t>
@@ -4659,7 +4870,7 @@
             <a:r>
               <a:rPr sz="2000" b="0" i="0">
                 <a:solidFill>
-                  <a:srgbClr val="2B2B2B"/>
+                  <a:srgbClr val="26231F"/>
                 </a:solidFill>
               </a:rPr>
               <a:t/>
@@ -4674,7 +4885,7 @@
             <a:r>
               <a:rPr sz="2000" b="0" i="0">
                 <a:solidFill>
-                  <a:srgbClr val="2B2B2B"/>
+                  <a:srgbClr val="26231F"/>
                 </a:solidFill>
               </a:rPr>
               <a:t>엄마 아빠의 마음을 적어 주세요.</a:t>
@@ -4689,7 +4900,7 @@
             <a:r>
               <a:rPr sz="2000" b="0" i="0">
                 <a:solidFill>
-                  <a:srgbClr val="2B2B2B"/>
+                  <a:srgbClr val="26231F"/>
                 </a:solidFill>
               </a:rPr>
               <a:t/>
@@ -4704,7 +4915,7 @@
             <a:r>
               <a:rPr sz="2000" b="0" i="0">
                 <a:solidFill>
-                  <a:srgbClr val="2B2B2B"/>
+                  <a:srgbClr val="26231F"/>
                 </a:solidFill>
               </a:rPr>
               <a:t>― 엄마 아빠가</a:t>
@@ -4726,7 +4937,7 @@
     <p:bg>
       <p:bgPr>
         <a:solidFill>
-          <a:srgbClr val="F3FCF3"/>
+          <a:srgbClr val="FFFFFF"/>
         </a:solidFill>
         <a:effectLst/>
       </p:bgPr>
@@ -4746,14 +4957,16 @@
         </p:nvSpPr>
         <p:spPr>
           <a:xfrm>
-            <a:off x="0" y="0"/>
-            <a:ext cx="12191695" cy="274320"/>
-          </a:xfrm>
-          <a:prstGeom prst="rect">
-            <a:avLst/>
+            <a:off x="640080" y="566928"/>
+            <a:ext cx="64008" cy="868680"/>
+          </a:xfrm>
+          <a:prstGeom prst="roundRect">
+            <a:avLst>
+              <a:gd name="adj" fmla="val 50000"/>
+            </a:avLst>
           </a:prstGeom>
           <a:solidFill>
-            <a:srgbClr val="4ECA4E"/>
+            <a:srgbClr val="97ED97"/>
           </a:solidFill>
           <a:ln>
             <a:noFill/>
@@ -4769,20 +4982,58 @@
       </p:sp>
       <p:sp>
         <p:nvSpPr>
-          <p:cNvPr id="4" name="장식"/>
-          <p:cNvSpPr/>
+          <p:cNvPr id="4" name="상단 라벨"/>
+          <p:cNvSpPr txBox="1"/>
           <p:nvPr/>
         </p:nvSpPr>
         <p:spPr>
           <a:xfrm>
-            <a:off x="0" y="274320"/>
-            <a:ext cx="12191695" cy="54864"/>
+            <a:off x="868680" y="274320"/>
+            <a:ext cx="5486400" cy="274320"/>
           </a:xfrm>
           <a:prstGeom prst="rect">
             <a:avLst/>
           </a:prstGeom>
+          <a:noFill/>
+        </p:spPr>
+        <p:txBody>
+          <a:bodyPr wrap="square" lIns="54864" rIns="54864" tIns="27432" bIns="27432" anchor="ctr">
+            <a:noAutofit/>
+          </a:bodyPr>
+          <a:lstStyle/>
+          <a:p>
+            <a:pPr algn="l">
+              <a:lnSpc>
+                <a:spcPct val="115000"/>
+              </a:lnSpc>
+            </a:pPr>
+            <a:r>
+              <a:rPr sz="900" b="1" i="0" spc="250">
+                <a:solidFill>
+                  <a:srgbClr val="8E8780"/>
+                </a:solidFill>
+              </a:rPr>
+              <a:t>FIRST BIRTHDAY</a:t>
+            </a:r>
+          </a:p>
+        </p:txBody>
+      </p:sp>
+      <p:sp>
+        <p:nvSpPr>
+          <p:cNvPr id="5" name="포인트"/>
+          <p:cNvSpPr/>
+          <p:nvPr/>
+        </p:nvSpPr>
+        <p:spPr>
+          <a:xfrm>
+            <a:off x="11167567" y="667512"/>
+            <a:ext cx="310896" cy="310896"/>
+          </a:xfrm>
+          <a:prstGeom prst="donut">
+            <a:avLst/>
+          </a:prstGeom>
           <a:solidFill>
-            <a:srgbClr val="339941"/>
+            <a:srgbClr val="A6F2A6"/>
           </a:solidFill>
           <a:ln>
             <a:noFill/>
@@ -4808,8 +5059,8 @@
         </p:nvSpPr>
         <p:spPr>
           <a:xfrm>
-            <a:off x="640080" y="457200"/>
-            <a:ext cx="9722815" cy="868680"/>
+            <a:off x="868680" y="566928"/>
+            <a:ext cx="9448495" cy="868680"/>
           </a:xfrm>
         </p:spPr>
         <p:txBody>
@@ -4826,7 +5077,7 @@
             <a:r>
               <a:rPr sz="3000" b="1" i="0">
                 <a:solidFill>
-                  <a:srgbClr val="216E21"/>
+                  <a:srgbClr val="26231F"/>
                 </a:solidFill>
               </a:rPr>
               <a:t>사진 모음</a:t>
@@ -4836,14 +5087,14 @@
       </p:sp>
       <p:sp>
         <p:nvSpPr>
-          <p:cNvPr id="5" name="사진 자리"/>
+          <p:cNvPr id="6" name="사진 자리"/>
           <p:cNvSpPr/>
           <p:nvPr/>
         </p:nvSpPr>
         <p:spPr>
           <a:xfrm>
-            <a:off x="640080" y="1600200"/>
-            <a:ext cx="2590723" cy="2308860"/>
+            <a:off x="640080" y="1783080"/>
+            <a:ext cx="2590723" cy="2194560"/>
           </a:xfrm>
           <a:prstGeom prst="roundRect">
             <a:avLst>
@@ -4851,12 +5102,10 @@
             </a:avLst>
           </a:prstGeom>
           <a:solidFill>
-            <a:srgbClr val="D4F7D4"/>
+            <a:srgbClr val="D1FAD1"/>
           </a:solidFill>
           <a:ln w="19050">
-            <a:solidFill>
-              <a:srgbClr val="4ECA4E"/>
-            </a:solidFill>
+            <a:noFill/>
             <a:prstDash val="dash"/>
           </a:ln>
         </p:spPr>
@@ -4874,7 +5123,7 @@
             <a:r>
               <a:rPr sz="1200" b="0" i="0">
                 <a:solidFill>
-                  <a:srgbClr val="216E21"/>
+                  <a:srgbClr val="8E8780"/>
                 </a:solidFill>
               </a:rPr>
               <a:t>사진 1</a:t>
@@ -4884,14 +5133,14 @@
       </p:sp>
       <p:sp>
         <p:nvSpPr>
-          <p:cNvPr id="6" name="사진 자리"/>
+          <p:cNvPr id="7" name="사진 자리"/>
           <p:cNvSpPr/>
           <p:nvPr/>
         </p:nvSpPr>
         <p:spPr>
           <a:xfrm>
-            <a:off x="3413683" y="1600200"/>
-            <a:ext cx="2590723" cy="2308860"/>
+            <a:off x="3413683" y="1783080"/>
+            <a:ext cx="2590723" cy="2194560"/>
           </a:xfrm>
           <a:prstGeom prst="roundRect">
             <a:avLst>
@@ -4899,12 +5148,10 @@
             </a:avLst>
           </a:prstGeom>
           <a:solidFill>
-            <a:srgbClr val="D4F7D4"/>
+            <a:srgbClr val="D1FAD1"/>
           </a:solidFill>
           <a:ln w="19050">
-            <a:solidFill>
-              <a:srgbClr val="4ECA4E"/>
-            </a:solidFill>
+            <a:noFill/>
             <a:prstDash val="dash"/>
           </a:ln>
         </p:spPr>
@@ -4922,7 +5169,7 @@
             <a:r>
               <a:rPr sz="1200" b="0" i="0">
                 <a:solidFill>
-                  <a:srgbClr val="216E21"/>
+                  <a:srgbClr val="8E8780"/>
                 </a:solidFill>
               </a:rPr>
               <a:t>사진 2</a:t>
@@ -4932,14 +5179,14 @@
       </p:sp>
       <p:sp>
         <p:nvSpPr>
-          <p:cNvPr id="7" name="사진 자리"/>
+          <p:cNvPr id="8" name="사진 자리"/>
           <p:cNvSpPr/>
           <p:nvPr/>
         </p:nvSpPr>
         <p:spPr>
           <a:xfrm>
-            <a:off x="6187287" y="1600200"/>
-            <a:ext cx="2590723" cy="2308860"/>
+            <a:off x="6187287" y="1783080"/>
+            <a:ext cx="2590723" cy="2194560"/>
           </a:xfrm>
           <a:prstGeom prst="roundRect">
             <a:avLst>
@@ -4947,12 +5194,10 @@
             </a:avLst>
           </a:prstGeom>
           <a:solidFill>
-            <a:srgbClr val="D4F7D4"/>
+            <a:srgbClr val="D1FAD1"/>
           </a:solidFill>
           <a:ln w="19050">
-            <a:solidFill>
-              <a:srgbClr val="4ECA4E"/>
-            </a:solidFill>
+            <a:noFill/>
             <a:prstDash val="dash"/>
           </a:ln>
         </p:spPr>
@@ -4970,7 +5215,7 @@
             <a:r>
               <a:rPr sz="1200" b="0" i="0">
                 <a:solidFill>
-                  <a:srgbClr val="216E21"/>
+                  <a:srgbClr val="8E8780"/>
                 </a:solidFill>
               </a:rPr>
               <a:t>사진 3</a:t>
@@ -4980,14 +5225,14 @@
       </p:sp>
       <p:sp>
         <p:nvSpPr>
-          <p:cNvPr id="8" name="사진 자리"/>
+          <p:cNvPr id="9" name="사진 자리"/>
           <p:cNvSpPr/>
           <p:nvPr/>
         </p:nvSpPr>
         <p:spPr>
           <a:xfrm>
-            <a:off x="8960891" y="1600200"/>
-            <a:ext cx="2590723" cy="2308860"/>
+            <a:off x="8960891" y="1783080"/>
+            <a:ext cx="2590723" cy="2194560"/>
           </a:xfrm>
           <a:prstGeom prst="roundRect">
             <a:avLst>
@@ -4995,12 +5240,10 @@
             </a:avLst>
           </a:prstGeom>
           <a:solidFill>
-            <a:srgbClr val="D4F7D4"/>
+            <a:srgbClr val="D1FAD1"/>
           </a:solidFill>
           <a:ln w="19050">
-            <a:solidFill>
-              <a:srgbClr val="4ECA4E"/>
-            </a:solidFill>
+            <a:noFill/>
             <a:prstDash val="dash"/>
           </a:ln>
         </p:spPr>
@@ -5018,7 +5261,7 @@
             <a:r>
               <a:rPr sz="1200" b="0" i="0">
                 <a:solidFill>
-                  <a:srgbClr val="216E21"/>
+                  <a:srgbClr val="8E8780"/>
                 </a:solidFill>
               </a:rPr>
               <a:t>사진 4</a:t>
@@ -5028,14 +5271,14 @@
       </p:sp>
       <p:sp>
         <p:nvSpPr>
-          <p:cNvPr id="9" name="사진 자리"/>
+          <p:cNvPr id="10" name="사진 자리"/>
           <p:cNvSpPr/>
           <p:nvPr/>
         </p:nvSpPr>
         <p:spPr>
           <a:xfrm>
-            <a:off x="640080" y="4091939"/>
-            <a:ext cx="2590723" cy="2308860"/>
+            <a:off x="640080" y="4160520"/>
+            <a:ext cx="2590723" cy="2194560"/>
           </a:xfrm>
           <a:prstGeom prst="roundRect">
             <a:avLst>
@@ -5043,12 +5286,10 @@
             </a:avLst>
           </a:prstGeom>
           <a:solidFill>
-            <a:srgbClr val="D4F7D4"/>
+            <a:srgbClr val="D1FAD1"/>
           </a:solidFill>
           <a:ln w="19050">
-            <a:solidFill>
-              <a:srgbClr val="4ECA4E"/>
-            </a:solidFill>
+            <a:noFill/>
             <a:prstDash val="dash"/>
           </a:ln>
         </p:spPr>
@@ -5066,7 +5307,7 @@
             <a:r>
               <a:rPr sz="1200" b="0" i="0">
                 <a:solidFill>
-                  <a:srgbClr val="216E21"/>
+                  <a:srgbClr val="8E8780"/>
                 </a:solidFill>
               </a:rPr>
               <a:t>사진 5</a:t>
@@ -5076,14 +5317,14 @@
       </p:sp>
       <p:sp>
         <p:nvSpPr>
-          <p:cNvPr id="10" name="사진 자리"/>
+          <p:cNvPr id="11" name="사진 자리"/>
           <p:cNvSpPr/>
           <p:nvPr/>
         </p:nvSpPr>
         <p:spPr>
           <a:xfrm>
-            <a:off x="3413683" y="4091939"/>
-            <a:ext cx="2590723" cy="2308860"/>
+            <a:off x="3413683" y="4160520"/>
+            <a:ext cx="2590723" cy="2194560"/>
           </a:xfrm>
           <a:prstGeom prst="roundRect">
             <a:avLst>
@@ -5091,12 +5332,10 @@
             </a:avLst>
           </a:prstGeom>
           <a:solidFill>
-            <a:srgbClr val="D4F7D4"/>
+            <a:srgbClr val="D1FAD1"/>
           </a:solidFill>
           <a:ln w="19050">
-            <a:solidFill>
-              <a:srgbClr val="4ECA4E"/>
-            </a:solidFill>
+            <a:noFill/>
             <a:prstDash val="dash"/>
           </a:ln>
         </p:spPr>
@@ -5114,7 +5353,7 @@
             <a:r>
               <a:rPr sz="1200" b="0" i="0">
                 <a:solidFill>
-                  <a:srgbClr val="216E21"/>
+                  <a:srgbClr val="8E8780"/>
                 </a:solidFill>
               </a:rPr>
               <a:t>사진 6</a:t>
@@ -5124,14 +5363,14 @@
       </p:sp>
       <p:sp>
         <p:nvSpPr>
-          <p:cNvPr id="11" name="사진 자리"/>
+          <p:cNvPr id="12" name="사진 자리"/>
           <p:cNvSpPr/>
           <p:nvPr/>
         </p:nvSpPr>
         <p:spPr>
           <a:xfrm>
-            <a:off x="6187287" y="4091939"/>
-            <a:ext cx="2590723" cy="2308860"/>
+            <a:off x="6187287" y="4160520"/>
+            <a:ext cx="2590723" cy="2194560"/>
           </a:xfrm>
           <a:prstGeom prst="roundRect">
             <a:avLst>
@@ -5139,12 +5378,10 @@
             </a:avLst>
           </a:prstGeom>
           <a:solidFill>
-            <a:srgbClr val="D4F7D4"/>
+            <a:srgbClr val="D1FAD1"/>
           </a:solidFill>
           <a:ln w="19050">
-            <a:solidFill>
-              <a:srgbClr val="4ECA4E"/>
-            </a:solidFill>
+            <a:noFill/>
             <a:prstDash val="dash"/>
           </a:ln>
         </p:spPr>
@@ -5162,7 +5399,7 @@
             <a:r>
               <a:rPr sz="1200" b="0" i="0">
                 <a:solidFill>
-                  <a:srgbClr val="216E21"/>
+                  <a:srgbClr val="8E8780"/>
                 </a:solidFill>
               </a:rPr>
               <a:t>사진 7</a:t>
@@ -5172,14 +5409,14 @@
       </p:sp>
       <p:sp>
         <p:nvSpPr>
-          <p:cNvPr id="12" name="사진 자리"/>
+          <p:cNvPr id="13" name="사진 자리"/>
           <p:cNvSpPr/>
           <p:nvPr/>
         </p:nvSpPr>
         <p:spPr>
           <a:xfrm>
-            <a:off x="8960891" y="4091939"/>
-            <a:ext cx="2590723" cy="2308860"/>
+            <a:off x="8960891" y="4160520"/>
+            <a:ext cx="2590723" cy="2194560"/>
           </a:xfrm>
           <a:prstGeom prst="roundRect">
             <a:avLst>
@@ -5187,12 +5424,10 @@
             </a:avLst>
           </a:prstGeom>
           <a:solidFill>
-            <a:srgbClr val="D4F7D4"/>
+            <a:srgbClr val="D1FAD1"/>
           </a:solidFill>
           <a:ln w="19050">
-            <a:solidFill>
-              <a:srgbClr val="4ECA4E"/>
-            </a:solidFill>
+            <a:noFill/>
             <a:prstDash val="dash"/>
           </a:ln>
         </p:spPr>
@@ -5210,7 +5445,7 @@
             <a:r>
               <a:rPr sz="1200" b="0" i="0">
                 <a:solidFill>
-                  <a:srgbClr val="216E21"/>
+                  <a:srgbClr val="8E8780"/>
                 </a:solidFill>
               </a:rPr>
               <a:t>사진 8</a:t>
@@ -5229,6 +5464,14 @@
 <file path=ppt/slides/slide6.xml><?xml version="1.0" encoding="utf-8"?>
 <p:sld xmlns:a="http://schemas.openxmlformats.org/drawingml/2006/main" xmlns:p="http://schemas.openxmlformats.org/presentationml/2006/main" xmlns:r="http://schemas.openxmlformats.org/officeDocument/2006/relationships">
   <p:cSld>
+    <p:bg>
+      <p:bgPr>
+        <a:solidFill>
+          <a:srgbClr val="EAFDEA"/>
+        </a:solidFill>
+        <a:effectLst/>
+      </p:bgPr>
+    </p:bg>
     <p:spTree>
       <p:nvGrpSpPr>
         <p:cNvPr id="1" name=""/>
@@ -5236,30 +5479,119 @@
         <p:nvPr/>
       </p:nvGrpSpPr>
       <p:grpSpPr/>
-      <p:pic>
-        <p:nvPicPr>
-          <p:cNvPr id="3" name="표지 그림" descr="birthday-09.jpg"/>
-          <p:cNvPicPr>
-            <a:picLocks noChangeAspect="1"/>
-          </p:cNvPicPr>
+      <p:sp>
+        <p:nvSpPr>
+          <p:cNvPr id="3" name="사진 자리"/>
+          <p:cNvSpPr/>
           <p:nvPr/>
-        </p:nvPicPr>
-        <p:blipFill>
-          <a:blip r:embed="rId2"/>
-          <a:stretch>
-            <a:fillRect/>
-          </a:stretch>
-        </p:blipFill>
-        <p:spPr>
-          <a:xfrm>
-            <a:off x="0" y="0"/>
-            <a:ext cx="12191695" cy="6858000"/>
+        </p:nvSpPr>
+        <p:spPr>
+          <a:xfrm>
+            <a:off x="1463003" y="685800"/>
+            <a:ext cx="3169840" cy="5486400"/>
+          </a:xfrm>
+          <a:prstGeom prst="round2SameRect">
+            <a:avLst>
+              <a:gd name="adj1" fmla="val 50000"/>
+              <a:gd name="adj2" fmla="val 0"/>
+            </a:avLst>
+          </a:prstGeom>
+          <a:solidFill>
+            <a:srgbClr val="A6F2A6"/>
+          </a:solidFill>
+          <a:ln>
+            <a:noFill/>
+          </a:ln>
+        </p:spPr>
+        <p:txBody>
+          <a:bodyPr rtlCol="0" anchor="ctr" wrap="square" lIns="54864" rIns="54864" tIns="27432" bIns="27432">
+            <a:noAutofit/>
+          </a:bodyPr>
+          <a:lstStyle/>
+          <a:p>
+            <a:pPr algn="ctr">
+              <a:lnSpc>
+                <a:spcPct val="100000"/>
+              </a:lnSpc>
+            </a:pPr>
+            <a:r>
+              <a:rPr sz="1400" b="0" i="0">
+                <a:solidFill>
+                  <a:srgbClr val="274927"/>
+                </a:solidFill>
+              </a:rPr>
+              <a:t>사진을 넣어 주세요</a:t>
+            </a:r>
+          </a:p>
+        </p:txBody>
+      </p:sp>
+      <p:sp>
+        <p:nvSpPr>
+          <p:cNvPr id="4" name="장식"/>
+          <p:cNvSpPr/>
+          <p:nvPr/>
+        </p:nvSpPr>
+        <p:spPr>
+          <a:xfrm>
+            <a:off x="4358505" y="4251960"/>
+            <a:ext cx="1005840" cy="1005840"/>
+          </a:xfrm>
+          <a:prstGeom prst="ellipse">
+            <a:avLst/>
+          </a:prstGeom>
+          <a:solidFill>
+            <a:srgbClr val="A6F2A6"/>
+          </a:solidFill>
+          <a:ln>
+            <a:noFill/>
+          </a:ln>
+        </p:spPr>
+        <p:txBody>
+          <a:bodyPr rtlCol="0" anchor="ctr"/>
+          <a:lstStyle/>
+          <a:p>
+            <a:pPr algn="ctr"/>
+          </a:p>
+        </p:txBody>
+      </p:sp>
+      <p:sp>
+        <p:nvSpPr>
+          <p:cNvPr id="5" name="라벨"/>
+          <p:cNvSpPr txBox="1"/>
+          <p:nvPr/>
+        </p:nvSpPr>
+        <p:spPr>
+          <a:xfrm>
+            <a:off x="6827349" y="2148840"/>
+            <a:ext cx="4632844" cy="274320"/>
           </a:xfrm>
           <a:prstGeom prst="rect">
             <a:avLst/>
           </a:prstGeom>
-        </p:spPr>
-      </p:pic>
+          <a:noFill/>
+        </p:spPr>
+        <p:txBody>
+          <a:bodyPr wrap="square" lIns="54864" rIns="54864" tIns="27432" bIns="27432" anchor="t">
+            <a:noAutofit/>
+          </a:bodyPr>
+          <a:lstStyle/>
+          <a:p>
+            <a:pPr algn="l">
+              <a:lnSpc>
+                <a:spcPct val="115000"/>
+              </a:lnSpc>
+            </a:pPr>
+            <a:r>
+              <a:rPr sz="1000" b="1" i="0" spc="250">
+                <a:solidFill>
+                  <a:srgbClr val="26231F"/>
+                </a:solidFill>
+              </a:rPr>
+              <a:t>FIRST BIRTHDAY</a:t>
+            </a:r>
+          </a:p>
+        </p:txBody>
+      </p:sp>
       <p:sp>
         <p:nvSpPr>
           <p:cNvPr id="2" name="Title 1"/>
@@ -5272,8 +5604,8 @@
         </p:nvSpPr>
         <p:spPr>
           <a:xfrm>
-            <a:off x="853418" y="2057400"/>
-            <a:ext cx="6095847" cy="1554480"/>
+            <a:off x="6827349" y="2606040"/>
+            <a:ext cx="4632844" cy="1188720"/>
           </a:xfrm>
         </p:spPr>
         <p:txBody>
@@ -5290,7 +5622,7 @@
             <a:r>
               <a:rPr sz="3400" b="1" i="0">
                 <a:solidFill>
-                  <a:srgbClr val="216E21"/>
+                  <a:srgbClr val="26231F"/>
                 </a:solidFill>
               </a:rPr>
               <a:t>와 주셔서 고맙습니다</a:t>
@@ -5300,14 +5632,14 @@
       </p:sp>
       <p:sp>
         <p:nvSpPr>
-          <p:cNvPr id="4" name="한 줄 문구"/>
+          <p:cNvPr id="6" name="한 줄 문구"/>
           <p:cNvSpPr txBox="1"/>
           <p:nvPr/>
         </p:nvSpPr>
         <p:spPr>
           <a:xfrm>
-            <a:off x="853418" y="3749039"/>
-            <a:ext cx="6095847" cy="822960"/>
+            <a:off x="6827349" y="3886200"/>
+            <a:ext cx="4632844" cy="822960"/>
           </a:xfrm>
           <a:prstGeom prst="rect">
             <a:avLst/>
@@ -5326,9 +5658,9 @@
               </a:lnSpc>
             </a:pPr>
             <a:r>
-              <a:rPr sz="1700" b="0" i="1">
+              <a:rPr sz="1700" b="0" i="0">
                 <a:solidFill>
-                  <a:srgbClr val="216E21"/>
+                  <a:srgbClr val="26231F"/>
                 </a:solidFill>
               </a:rPr>
               <a:t>아이가 한 살이 되었습니다</a:t>
@@ -5338,14 +5670,14 @@
       </p:sp>
       <p:sp>
         <p:nvSpPr>
-          <p:cNvPr id="5" name="안내 문구"/>
+          <p:cNvPr id="7" name="안내 문구"/>
           <p:cNvSpPr txBox="1"/>
           <p:nvPr/>
         </p:nvSpPr>
         <p:spPr>
           <a:xfrm>
-            <a:off x="853418" y="4617720"/>
-            <a:ext cx="6095847" cy="914400"/>
+            <a:off x="6827349" y="4754880"/>
+            <a:ext cx="4632844" cy="914400"/>
           </a:xfrm>
           <a:prstGeom prst="rect">
             <a:avLst/>
@@ -5366,7 +5698,7 @@
             <a:r>
               <a:rPr sz="1400" b="0" i="0">
                 <a:solidFill>
-                  <a:srgbClr val="666666"/>
+                  <a:srgbClr val="26231F"/>
                 </a:solidFill>
               </a:rPr>
               <a:t>아기 이름 · 부모 이름</a:t>
@@ -5393,34 +5725,34 @@
         <a:sysClr val="window" lastClr="FFFFFF"/>
       </a:lt1>
       <a:dk2>
-        <a:srgbClr val="216E21"/>
+        <a:srgbClr val="274927"/>
       </a:dk2>
       <a:lt2>
-        <a:srgbClr val="F3FCF3"/>
+        <a:srgbClr val="EAFDEA"/>
       </a:lt2>
       <a:accent1>
-        <a:srgbClr val="4ECA4E"/>
+        <a:srgbClr val="97ED97"/>
       </a:accent1>
       <a:accent2>
-        <a:srgbClr val="339941"/>
+        <a:srgbClr val="BAF3D4"/>
       </a:accent2>
       <a:accent3>
-        <a:srgbClr val="216E21"/>
+        <a:srgbClr val="274927"/>
       </a:accent3>
       <a:accent4>
-        <a:srgbClr val="D4F7D4"/>
+        <a:srgbClr val="D1FAD1"/>
       </a:accent4>
       <a:accent5>
-        <a:srgbClr val="40B248"/>
+        <a:srgbClr val="A8F0B6"/>
       </a:accent5>
       <a:accent6>
-        <a:srgbClr val="7AA87A"/>
+        <a:srgbClr val="7D927D"/>
       </a:accent6>
       <a:hlink>
-        <a:srgbClr val="4ECA4E"/>
+        <a:srgbClr val="97ED97"/>
       </a:hlink>
       <a:folHlink>
-        <a:srgbClr val="216E21"/>
+        <a:srgbClr val="274927"/>
       </a:folHlink>
     </a:clrScheme>
     <a:fontScheme name="Office">
